--- a/docs/slide-assets/CopperDome-3min.pptx
+++ b/docs/slide-assets/CopperDome-3min.pptx
@@ -4,17 +4,20 @@
   <p:sldMasterIdLst>
     <p:sldMasterId id="2147483648" r:id="rId1"/>
   </p:sldMasterIdLst>
+  <p:notesMasterIdLst>
+    <p:notesMasterId r:id="rId10"/>
+  </p:notesMasterIdLst>
   <p:sldIdLst>
-    <p:sldId id="256" r:id="rId7"/>
-    <p:sldId id="257" r:id="rId9"/>
-    <p:sldId id="258" r:id="rId10"/>
-    <p:sldId id="259" r:id="rId11"/>
-    <p:sldId id="260" r:id="rId12"/>
-    <p:sldId id="261" r:id="rId13"/>
-    <p:sldId id="262" r:id="rId14"/>
-    <p:sldId id="263" r:id="rId15"/>
+    <p:sldId id="256" r:id="rId2"/>
+    <p:sldId id="257" r:id="rId3"/>
+    <p:sldId id="258" r:id="rId4"/>
+    <p:sldId id="259" r:id="rId5"/>
+    <p:sldId id="260" r:id="rId6"/>
+    <p:sldId id="261" r:id="rId7"/>
+    <p:sldId id="262" r:id="rId8"/>
+    <p:sldId id="263" r:id="rId9"/>
   </p:sldIdLst>
-  <p:sldSz cx="12191695" cy="6858000" type="screen4x3"/>
+  <p:sldSz cx="12192000" cy="6858000"/>
   <p:notesSz cx="6858000" cy="9144000"/>
   <p:defaultTextStyle>
     <a:defPPr>
@@ -111,11 +114,27 @@
       </a:defRPr>
     </a:lvl9pPr>
   </p:defaultTextStyle>
+  <p:extLst>
+    <p:ext uri="{EFAFB233-063F-42B5-8137-9DF3F51BA10A}">
+      <p15:sldGuideLst xmlns:p15="http://schemas.microsoft.com/office/powerpoint/2012/main">
+        <p15:guide id="1" orient="horz" pos="2160">
+          <p15:clr>
+            <a:srgbClr val="A4A3A4"/>
+          </p15:clr>
+        </p15:guide>
+        <p15:guide id="2" pos="2880">
+          <p15:clr>
+            <a:srgbClr val="A4A3A4"/>
+          </p15:clr>
+        </p15:guide>
+      </p15:sldGuideLst>
+    </p:ext>
+  </p:extLst>
 </p:presentation>
 </file>
 
 <file path=ppt/notesMasters/notesMaster1.xml><?xml version="1.0" encoding="utf-8"?>
-<p:notesMaster xmlns:a="http://schemas.openxmlformats.org/drawingml/2006/main" xmlns:p="http://schemas.openxmlformats.org/presentationml/2006/main" xmlns:r="http://schemas.openxmlformats.org/officeDocument/2006/relationships">
+<p:notesMaster xmlns:a="http://schemas.openxmlformats.org/drawingml/2006/main" xmlns:r="http://schemas.openxmlformats.org/officeDocument/2006/relationships" xmlns:p="http://schemas.openxmlformats.org/presentationml/2006/main">
   <p:cSld>
     <p:bg>
       <p:bgRef idx="1001">
@@ -136,241 +155,16 @@
           <a:chExt cx="0" cy="0"/>
         </a:xfrm>
       </p:grpSpPr>
-      <p:sp>
-        <p:nvSpPr>
-          <p:cNvPr id="2" name="Header Placeholder 1"/>
-          <p:cNvSpPr>
-            <a:spLocks noGrp="1"/>
-          </p:cNvSpPr>
-          <p:nvPr>
-            <p:ph type="hdr" sz="quarter"/>
-          </p:nvPr>
-        </p:nvSpPr>
-        <p:spPr>
-          <a:xfrm>
-            <a:off x="0" y="0"/>
-            <a:ext cx="2971800" cy="457200"/>
-          </a:xfrm>
-          <a:prstGeom prst="rect">
-            <a:avLst/>
-          </a:prstGeom>
-        </p:spPr>
-        <p:txBody>
-          <a:bodyPr vert="horz" lIns="91440" tIns="45720" rIns="91440" bIns="45720" rtlCol="0"/>
-          <a:lstStyle>
-            <a:lvl1pPr algn="l">
-              <a:defRPr sz="1200"/>
-            </a:lvl1pPr>
-          </a:lstStyle>
-          <a:p>
-            <a:endParaRPr lang="en-US"/>
-          </a:p>
-        </p:txBody>
-      </p:sp>
-      <p:sp>
-        <p:nvSpPr>
-          <p:cNvPr id="3" name="Date Placeholder 2"/>
-          <p:cNvSpPr>
-            <a:spLocks noGrp="1"/>
-          </p:cNvSpPr>
-          <p:nvPr>
-            <p:ph type="dt" idx="1"/>
-          </p:nvPr>
-        </p:nvSpPr>
-        <p:spPr>
-          <a:xfrm>
-            <a:off x="3884613" y="0"/>
-            <a:ext cx="2971800" cy="457200"/>
-          </a:xfrm>
-          <a:prstGeom prst="rect">
-            <a:avLst/>
-          </a:prstGeom>
-        </p:spPr>
-        <p:txBody>
-          <a:bodyPr vert="horz" lIns="91440" tIns="45720" rIns="91440" bIns="45720" rtlCol="0"/>
-          <a:lstStyle>
-            <a:lvl1pPr algn="r">
-              <a:defRPr sz="1200"/>
-            </a:lvl1pPr>
-          </a:lstStyle>
-          <a:p>
-            <a:fld id="{0F89C1C7-3DCD-1040-A9CF-14679D8B5DDD}" type="datetimeFigureOut">
-              <a:rPr lang="en-US" smtClean="0"/>
-              <a:t>10/17/16</a:t>
-            </a:fld>
-            <a:endParaRPr lang="en-US"/>
-          </a:p>
-        </p:txBody>
-      </p:sp>
-      <p:sp>
-        <p:nvSpPr>
-          <p:cNvPr id="4" name="Slide Image Placeholder 3"/>
-          <p:cNvSpPr>
-            <a:spLocks noGrp="1" noRot="1" noChangeAspect="1"/>
-          </p:cNvSpPr>
-          <p:nvPr>
-            <p:ph type="sldImg" idx="2"/>
-          </p:nvPr>
-        </p:nvSpPr>
-        <p:spPr>
-          <a:xfrm>
-            <a:off x="1143000" y="685800"/>
-            <a:ext cx="4572000" cy="3429000"/>
-          </a:xfrm>
-          <a:prstGeom prst="rect">
-            <a:avLst/>
-          </a:prstGeom>
-          <a:noFill/>
-          <a:ln w="12700">
-            <a:solidFill>
-              <a:prstClr val="black"/>
-            </a:solidFill>
-          </a:ln>
-        </p:spPr>
-        <p:txBody>
-          <a:bodyPr vert="horz" lIns="91440" tIns="45720" rIns="91440" bIns="45720" rtlCol="0" anchor="ctr"/>
-          <a:lstStyle/>
-          <a:p>
-            <a:endParaRPr lang="en-US"/>
-          </a:p>
-        </p:txBody>
-      </p:sp>
-      <p:sp>
-        <p:nvSpPr>
-          <p:cNvPr id="5" name="Notes Placeholder 4"/>
-          <p:cNvSpPr>
-            <a:spLocks noGrp="1"/>
-          </p:cNvSpPr>
-          <p:nvPr>
-            <p:ph type="body" sz="quarter" idx="3"/>
-          </p:nvPr>
-        </p:nvSpPr>
-        <p:spPr>
-          <a:xfrm>
-            <a:off x="685800" y="4343400"/>
-            <a:ext cx="5486400" cy="4114800"/>
-          </a:xfrm>
-          <a:prstGeom prst="rect">
-            <a:avLst/>
-          </a:prstGeom>
-        </p:spPr>
-        <p:txBody>
-          <a:bodyPr vert="horz" lIns="91440" tIns="45720" rIns="91440" bIns="45720" rtlCol="0"/>
-          <a:lstStyle/>
-          <a:p>
-            <a:pPr lvl="0"/>
-            <a:r>
-              <a:rPr lang="en-US" smtClean="0"/>
-              <a:t>Click to edit Master text styles</a:t>
-            </a:r>
-          </a:p>
-          <a:p>
-            <a:pPr lvl="1"/>
-            <a:r>
-              <a:rPr lang="en-US" smtClean="0"/>
-              <a:t>Second level</a:t>
-            </a:r>
-          </a:p>
-          <a:p>
-            <a:pPr lvl="2"/>
-            <a:r>
-              <a:rPr lang="en-US" smtClean="0"/>
-              <a:t>Third level</a:t>
-            </a:r>
-          </a:p>
-          <a:p>
-            <a:pPr lvl="3"/>
-            <a:r>
-              <a:rPr lang="en-US" smtClean="0"/>
-              <a:t>Fourth level</a:t>
-            </a:r>
-          </a:p>
-          <a:p>
-            <a:pPr lvl="4"/>
-            <a:r>
-              <a:rPr lang="en-US" smtClean="0"/>
-              <a:t>Fifth level</a:t>
-            </a:r>
-            <a:endParaRPr lang="en-US"/>
-          </a:p>
-        </p:txBody>
-      </p:sp>
-      <p:sp>
-        <p:nvSpPr>
-          <p:cNvPr id="6" name="Footer Placeholder 5"/>
-          <p:cNvSpPr>
-            <a:spLocks noGrp="1"/>
-          </p:cNvSpPr>
-          <p:nvPr>
-            <p:ph type="ftr" sz="quarter" idx="4"/>
-          </p:nvPr>
-        </p:nvSpPr>
-        <p:spPr>
-          <a:xfrm>
-            <a:off x="0" y="8685213"/>
-            <a:ext cx="2971800" cy="457200"/>
-          </a:xfrm>
-          <a:prstGeom prst="rect">
-            <a:avLst/>
-          </a:prstGeom>
-        </p:spPr>
-        <p:txBody>
-          <a:bodyPr vert="horz" lIns="91440" tIns="45720" rIns="91440" bIns="45720" rtlCol="0" anchor="b"/>
-          <a:lstStyle>
-            <a:lvl1pPr algn="l">
-              <a:defRPr sz="1200"/>
-            </a:lvl1pPr>
-          </a:lstStyle>
-          <a:p>
-            <a:endParaRPr lang="en-US"/>
-          </a:p>
-        </p:txBody>
-      </p:sp>
-      <p:sp>
-        <p:nvSpPr>
-          <p:cNvPr id="7" name="Slide Number Placeholder 6"/>
-          <p:cNvSpPr>
-            <a:spLocks noGrp="1"/>
-          </p:cNvSpPr>
-          <p:nvPr>
-            <p:ph type="sldNum" sz="quarter" idx="5"/>
-          </p:nvPr>
-        </p:nvSpPr>
-        <p:spPr>
-          <a:xfrm>
-            <a:off x="3884613" y="8685213"/>
-            <a:ext cx="2971800" cy="457200"/>
-          </a:xfrm>
-          <a:prstGeom prst="rect">
-            <a:avLst/>
-          </a:prstGeom>
-        </p:spPr>
-        <p:txBody>
-          <a:bodyPr vert="horz" lIns="91440" tIns="45720" rIns="91440" bIns="45720" rtlCol="0" anchor="b"/>
-          <a:lstStyle>
-            <a:lvl1pPr algn="r">
-              <a:defRPr sz="1200"/>
-            </a:lvl1pPr>
-          </a:lstStyle>
-          <a:p>
-            <a:fld id="{BB5E49A5-4136-284D-997B-48E1D791AD67}" type="slidenum">
-              <a:rPr lang="en-US" smtClean="0"/>
-              <a:t>‹#›</a:t>
-            </a:fld>
-            <a:endParaRPr lang="en-US"/>
-          </a:p>
-        </p:txBody>
-      </p:sp>
     </p:spTree>
     <p:extLst>
       <p:ext uri="{BB962C8B-B14F-4D97-AF65-F5344CB8AC3E}">
-        <p14:creationId xmlns:p14="http://schemas.microsoft.com/office/powerpoint/2010/main" val="2623252185"/>
+        <p14:creationId xmlns:p14="http://schemas.microsoft.com/office/powerpoint/2010/main" val="931082780"/>
       </p:ext>
     </p:extLst>
   </p:cSld>
   <p:clrMap bg1="lt1" tx1="dk1" bg2="lt2" tx2="dk2" accent1="accent1" accent2="accent2" accent3="accent3" accent4="accent4" accent5="accent5" accent6="accent6" hlink="hlink" folHlink="folHlink"/>
   <p:notesStyle>
-    <a:lvl1pPr marL="0" algn="l" defTabSz="457200" rtl="0" eaLnBrk="1" latinLnBrk="0" hangingPunct="1">
+    <a:lvl1pPr marL="0" algn="l" defTabSz="914400" rtl="0" eaLnBrk="1" latinLnBrk="0" hangingPunct="1">
       <a:defRPr sz="1200" kern="1200">
         <a:solidFill>
           <a:schemeClr val="tx1"/>
@@ -380,7 +174,7 @@
         <a:cs typeface="+mn-cs"/>
       </a:defRPr>
     </a:lvl1pPr>
-    <a:lvl2pPr marL="457200" algn="l" defTabSz="457200" rtl="0" eaLnBrk="1" latinLnBrk="0" hangingPunct="1">
+    <a:lvl2pPr marL="457200" algn="l" defTabSz="914400" rtl="0" eaLnBrk="1" latinLnBrk="0" hangingPunct="1">
       <a:defRPr sz="1200" kern="1200">
         <a:solidFill>
           <a:schemeClr val="tx1"/>
@@ -390,7 +184,7 @@
         <a:cs typeface="+mn-cs"/>
       </a:defRPr>
     </a:lvl2pPr>
-    <a:lvl3pPr marL="914400" algn="l" defTabSz="457200" rtl="0" eaLnBrk="1" latinLnBrk="0" hangingPunct="1">
+    <a:lvl3pPr marL="914400" algn="l" defTabSz="914400" rtl="0" eaLnBrk="1" latinLnBrk="0" hangingPunct="1">
       <a:defRPr sz="1200" kern="1200">
         <a:solidFill>
           <a:schemeClr val="tx1"/>
@@ -400,7 +194,7 @@
         <a:cs typeface="+mn-cs"/>
       </a:defRPr>
     </a:lvl3pPr>
-    <a:lvl4pPr marL="1371600" algn="l" defTabSz="457200" rtl="0" eaLnBrk="1" latinLnBrk="0" hangingPunct="1">
+    <a:lvl4pPr marL="1371600" algn="l" defTabSz="914400" rtl="0" eaLnBrk="1" latinLnBrk="0" hangingPunct="1">
       <a:defRPr sz="1200" kern="1200">
         <a:solidFill>
           <a:schemeClr val="tx1"/>
@@ -410,7 +204,7 @@
         <a:cs typeface="+mn-cs"/>
       </a:defRPr>
     </a:lvl4pPr>
-    <a:lvl5pPr marL="1828800" algn="l" defTabSz="457200" rtl="0" eaLnBrk="1" latinLnBrk="0" hangingPunct="1">
+    <a:lvl5pPr marL="1828800" algn="l" defTabSz="914400" rtl="0" eaLnBrk="1" latinLnBrk="0" hangingPunct="1">
       <a:defRPr sz="1200" kern="1200">
         <a:solidFill>
           <a:schemeClr val="tx1"/>
@@ -420,7 +214,7 @@
         <a:cs typeface="+mn-cs"/>
       </a:defRPr>
     </a:lvl5pPr>
-    <a:lvl6pPr marL="2286000" algn="l" defTabSz="457200" rtl="0" eaLnBrk="1" latinLnBrk="0" hangingPunct="1">
+    <a:lvl6pPr marL="2286000" algn="l" defTabSz="914400" rtl="0" eaLnBrk="1" latinLnBrk="0" hangingPunct="1">
       <a:defRPr sz="1200" kern="1200">
         <a:solidFill>
           <a:schemeClr val="tx1"/>
@@ -430,7 +224,7 @@
         <a:cs typeface="+mn-cs"/>
       </a:defRPr>
     </a:lvl6pPr>
-    <a:lvl7pPr marL="2743200" algn="l" defTabSz="457200" rtl="0" eaLnBrk="1" latinLnBrk="0" hangingPunct="1">
+    <a:lvl7pPr marL="2743200" algn="l" defTabSz="914400" rtl="0" eaLnBrk="1" latinLnBrk="0" hangingPunct="1">
       <a:defRPr sz="1200" kern="1200">
         <a:solidFill>
           <a:schemeClr val="tx1"/>
@@ -440,7 +234,7 @@
         <a:cs typeface="+mn-cs"/>
       </a:defRPr>
     </a:lvl7pPr>
-    <a:lvl8pPr marL="3200400" algn="l" defTabSz="457200" rtl="0" eaLnBrk="1" latinLnBrk="0" hangingPunct="1">
+    <a:lvl8pPr marL="3200400" algn="l" defTabSz="914400" rtl="0" eaLnBrk="1" latinLnBrk="0" hangingPunct="1">
       <a:defRPr sz="1200" kern="1200">
         <a:solidFill>
           <a:schemeClr val="tx1"/>
@@ -450,7 +244,7 @@
         <a:cs typeface="+mn-cs"/>
       </a:defRPr>
     </a:lvl8pPr>
-    <a:lvl9pPr marL="3657600" algn="l" defTabSz="457200" rtl="0" eaLnBrk="1" latinLnBrk="0" hangingPunct="1">
+    <a:lvl9pPr marL="3657600" algn="l" defTabSz="914400" rtl="0" eaLnBrk="1" latinLnBrk="0" hangingPunct="1">
       <a:defRPr sz="1200" kern="1200">
         <a:solidFill>
           <a:schemeClr val="tx1"/>
@@ -465,7 +259,7 @@
 </file>
 
 <file path=ppt/notesSlides/notesSlide1.xml><?xml version="1.0" encoding="utf-8"?>
-<p:notes xmlns:a="http://schemas.openxmlformats.org/drawingml/2006/main" xmlns:p="http://schemas.openxmlformats.org/presentationml/2006/main" xmlns:r="http://schemas.openxmlformats.org/officeDocument/2006/relationships">
+<p:notes xmlns:a="http://schemas.openxmlformats.org/drawingml/2006/main" xmlns:r="http://schemas.openxmlformats.org/officeDocument/2006/relationships" xmlns:p="http://schemas.openxmlformats.org/presentationml/2006/main">
   <p:cSld>
     <p:spTree>
       <p:nvGrpSpPr>
@@ -485,43 +279,43 @@
         <p:nvSpPr>
           <p:cNvPr id="2" name="Slide Image Placeholder 1"/>
           <p:cNvSpPr>
+            <a:spLocks noGrp="1" noRot="1" noChangeAspect="1"/>
+          </p:cNvSpPr>
+          <p:nvPr>
+            <p:ph type="sldImg" idx="2"/>
+          </p:nvPr>
+        </p:nvSpPr>
+        <p:spPr/>
+      </p:sp>
+      <p:sp>
+        <p:nvSpPr>
+          <p:cNvPr id="3" name="Notes Placeholder 2"/>
+          <p:cNvSpPr>
             <a:spLocks noGrp="1"/>
           </p:cNvSpPr>
           <p:nvPr>
-            <p:ph type="sldImg" idx="2"/>
+            <p:ph type="body" sz="quarter" idx="3"/>
           </p:nvPr>
         </p:nvSpPr>
         <p:spPr/>
-      </p:sp>
-      <p:sp>
-        <p:nvSpPr>
-          <p:cNvPr id="3" name="Notes Placeholder 2"/>
+        <p:txBody>
+          <a:bodyPr/>
+          <a:lstStyle/>
+          <a:p>
+            <a:r>
+              <a:t>สวัสดีครับ กลุ่มเรานำเสนอ Copper Dome Turret — ป้อมยิงอัตโนมัติที่ให้ผู้ใช้คลิกเลือกเป้าบนจอ แล้วป้อมหันไปยิงเอง เขียนด้วย Python ทั้งหมด</a:t>
+            </a:r>
+          </a:p>
+        </p:txBody>
+      </p:sp>
+      <p:sp>
+        <p:nvSpPr>
+          <p:cNvPr id="4" name="Slide Number Placeholder 3"/>
           <p:cNvSpPr>
             <a:spLocks noGrp="1"/>
           </p:cNvSpPr>
           <p:nvPr>
-            <p:ph type="body" idx="3" sz="quarter"/>
-          </p:nvPr>
-        </p:nvSpPr>
-        <p:spPr/>
-        <p:txBody>
-          <a:bodyPr/>
-          <a:lstStyle/>
-          <a:p>
-            <a:r>
-              <a:t>สวัสดีครับ กลุ่มเรานำเสนอ Copper Dome Turret — ป้อมยิงอัตโนมัติที่ให้ผู้ใช้คลิกเลือกเป้าบนจอ แล้วป้อมหันไปยิงเอง เขียนด้วย Python ทั้งหมด</a:t>
-            </a:r>
-          </a:p>
-        </p:txBody>
-      </p:sp>
-      <p:sp>
-        <p:nvSpPr>
-          <p:cNvPr id="4" name="Slide Number Placeholder 3"/>
-          <p:cNvSpPr>
-            <a:spLocks noGrp="1"/>
-          </p:cNvSpPr>
-          <p:nvPr>
-            <p:ph type="sldNum" idx="5" sz="quarter"/>
+            <p:ph type="sldNum" sz="quarter" idx="5"/>
           </p:nvPr>
         </p:nvSpPr>
         <p:spPr/>
@@ -535,7 +329,7 @@
 </file>
 
 <file path=ppt/notesSlides/notesSlide2.xml><?xml version="1.0" encoding="utf-8"?>
-<p:notes xmlns:a="http://schemas.openxmlformats.org/drawingml/2006/main" xmlns:p="http://schemas.openxmlformats.org/presentationml/2006/main" xmlns:r="http://schemas.openxmlformats.org/officeDocument/2006/relationships">
+<p:notes xmlns:a="http://schemas.openxmlformats.org/drawingml/2006/main" xmlns:r="http://schemas.openxmlformats.org/officeDocument/2006/relationships" xmlns:p="http://schemas.openxmlformats.org/presentationml/2006/main">
   <p:cSld>
     <p:spTree>
       <p:nvGrpSpPr>
@@ -555,43 +349,43 @@
         <p:nvSpPr>
           <p:cNvPr id="2" name="Slide Image Placeholder 1"/>
           <p:cNvSpPr>
+            <a:spLocks noGrp="1" noRot="1" noChangeAspect="1"/>
+          </p:cNvSpPr>
+          <p:nvPr>
+            <p:ph type="sldImg" idx="2"/>
+          </p:nvPr>
+        </p:nvSpPr>
+        <p:spPr/>
+      </p:sp>
+      <p:sp>
+        <p:nvSpPr>
+          <p:cNvPr id="3" name="Notes Placeholder 2"/>
+          <p:cNvSpPr>
             <a:spLocks noGrp="1"/>
           </p:cNvSpPr>
           <p:nvPr>
-            <p:ph type="sldImg" idx="2"/>
+            <p:ph type="body" sz="quarter" idx="3"/>
           </p:nvPr>
         </p:nvSpPr>
         <p:spPr/>
-      </p:sp>
-      <p:sp>
-        <p:nvSpPr>
-          <p:cNvPr id="3" name="Notes Placeholder 2"/>
+        <p:txBody>
+          <a:bodyPr/>
+          <a:lstStyle/>
+          <a:p>
+            <a:r>
+              <a:t>ภาพรวมระบบเป็นแบบนี้ครับ กล้องมือถือส่งภาพเข้าคอม คอมรันโมเดลตรวจจับและตัวคุมการเล็ง แล้วส่งคำสั่งผ่าน Firmata ไปที่ Arduino ซึ่งทำหน้าที่เป็นแค่ช่องสัญญาณเข้าออก ไม่มีตรรกะอยู่บนบอร์ดเลย ตรรกะทุกบรรทัดอยู่ฝั่ง Python ตามกติกาที่กำหนดให้ใช้ Python อย่างเดียว</a:t>
+            </a:r>
+          </a:p>
+        </p:txBody>
+      </p:sp>
+      <p:sp>
+        <p:nvSpPr>
+          <p:cNvPr id="4" name="Slide Number Placeholder 3"/>
           <p:cNvSpPr>
             <a:spLocks noGrp="1"/>
           </p:cNvSpPr>
           <p:nvPr>
-            <p:ph type="body" idx="3" sz="quarter"/>
-          </p:nvPr>
-        </p:nvSpPr>
-        <p:spPr/>
-        <p:txBody>
-          <a:bodyPr/>
-          <a:lstStyle/>
-          <a:p>
-            <a:r>
-              <a:t>ภาพรวมระบบเป็นแบบนี้ครับ กล้องมือถือส่งภาพเข้าคอม คอมรันโมเดลตรวจจับและตัวคุมการเล็ง แล้วส่งคำสั่งผ่าน Firmata ไปที่ Arduino ซึ่งทำหน้าที่เป็นแค่ช่องสัญญาณเข้าออก ไม่มีตรรกะอยู่บนบอร์ดเลย ตรรกะทุกบรรทัดอยู่ฝั่ง Python ตามกติกาที่กำหนดให้ใช้ Python อย่างเดียว</a:t>
-            </a:r>
-          </a:p>
-        </p:txBody>
-      </p:sp>
-      <p:sp>
-        <p:nvSpPr>
-          <p:cNvPr id="4" name="Slide Number Placeholder 3"/>
-          <p:cNvSpPr>
-            <a:spLocks noGrp="1"/>
-          </p:cNvSpPr>
-          <p:nvPr>
-            <p:ph type="sldNum" idx="5" sz="quarter"/>
+            <p:ph type="sldNum" sz="quarter" idx="5"/>
           </p:nvPr>
         </p:nvSpPr>
         <p:spPr/>
@@ -605,7 +399,7 @@
 </file>
 
 <file path=ppt/notesSlides/notesSlide3.xml><?xml version="1.0" encoding="utf-8"?>
-<p:notes xmlns:a="http://schemas.openxmlformats.org/drawingml/2006/main" xmlns:p="http://schemas.openxmlformats.org/presentationml/2006/main" xmlns:r="http://schemas.openxmlformats.org/officeDocument/2006/relationships">
+<p:notes xmlns:a="http://schemas.openxmlformats.org/drawingml/2006/main" xmlns:r="http://schemas.openxmlformats.org/officeDocument/2006/relationships" xmlns:p="http://schemas.openxmlformats.org/presentationml/2006/main">
   <p:cSld>
     <p:spTree>
       <p:nvGrpSpPr>
@@ -625,43 +419,43 @@
         <p:nvSpPr>
           <p:cNvPr id="2" name="Slide Image Placeholder 1"/>
           <p:cNvSpPr>
+            <a:spLocks noGrp="1" noRot="1" noChangeAspect="1"/>
+          </p:cNvSpPr>
+          <p:nvPr>
+            <p:ph type="sldImg" idx="2"/>
+          </p:nvPr>
+        </p:nvSpPr>
+        <p:spPr/>
+      </p:sp>
+      <p:sp>
+        <p:nvSpPr>
+          <p:cNvPr id="3" name="Notes Placeholder 2"/>
+          <p:cNvSpPr>
             <a:spLocks noGrp="1"/>
           </p:cNvSpPr>
           <p:nvPr>
-            <p:ph type="sldImg" idx="2"/>
+            <p:ph type="body" sz="quarter" idx="3"/>
           </p:nvPr>
         </p:nvSpPr>
         <p:spPr/>
-      </p:sp>
-      <p:sp>
-        <p:nvSpPr>
-          <p:cNvPr id="3" name="Notes Placeholder 2"/>
+        <p:txBody>
+          <a:bodyPr/>
+          <a:lstStyle/>
+          <a:p>
+            <a:r>
+              <a:t>กลไกยิงเป็นล้อฟลายวีลสองล้อหมุนสวนทางกัน หนีบลูกบอลไม้แล้วสะบัดออก ป้อนลูกด้วยแมกกาซีนแรงโน้มถ่วง ไม่ต้องมีเซอร์โวดันลูก ตัวป้อมหมุนสองแกน แกนส่ายใช้เซอร์โว MG945 หมุนได้บวกลบห้าสิบองศา แกนเงยใช้เซอร์โวอีกตัวขับผ่านเฟืองสะพาน — จุดที่ต้องเล่าคือมอเตอร์ครับ ตอนแรกใช้มอเตอร์ TT ทั้งชุด ยิงไม่ออกเลย เพราะมันมีเกียร์ทดรอบ เราถอดเกียร์บ็อกซ์ออกใช้แกนมอเตอร์เปลือย ยิงออกเกินหนึ่งเมตรครึ่งทันที เดี๋ยวสไลด์คำนวณจะบอกว่ารู้ได้ยังไงว่าต้องถอด</a:t>
+            </a:r>
+          </a:p>
+        </p:txBody>
+      </p:sp>
+      <p:sp>
+        <p:nvSpPr>
+          <p:cNvPr id="4" name="Slide Number Placeholder 3"/>
           <p:cNvSpPr>
             <a:spLocks noGrp="1"/>
           </p:cNvSpPr>
           <p:nvPr>
-            <p:ph type="body" idx="3" sz="quarter"/>
-          </p:nvPr>
-        </p:nvSpPr>
-        <p:spPr/>
-        <p:txBody>
-          <a:bodyPr/>
-          <a:lstStyle/>
-          <a:p>
-            <a:r>
-              <a:t>กลไกยิงเป็นล้อฟลายวีลสองล้อหมุนสวนทางกัน หนีบลูกบอลไม้แล้วสะบัดออก ป้อนลูกด้วยแมกกาซีนแรงโน้มถ่วง ไม่ต้องมีเซอร์โวดันลูก ตัวป้อมหมุนสองแกน แกนส่ายใช้เซอร์โว MG945 หมุนได้บวกลบห้าสิบองศา แกนเงยใช้เซอร์โวอีกตัวขับผ่านเฟืองสะพาน — จุดที่ต้องเล่าคือมอเตอร์ครับ ตอนแรกใช้มอเตอร์ TT ทั้งชุด ยิงไม่ออกเลย เพราะมันมีเกียร์ทดรอบ เราถอดเกียร์บ็อกซ์ออกใช้แกนมอเตอร์เปลือย ยิงออกเกินหนึ่งเมตรครึ่งทันที เดี๋ยวสไลด์คำนวณจะบอกว่ารู้ได้ยังไงว่าต้องถอด</a:t>
-            </a:r>
-          </a:p>
-        </p:txBody>
-      </p:sp>
-      <p:sp>
-        <p:nvSpPr>
-          <p:cNvPr id="4" name="Slide Number Placeholder 3"/>
-          <p:cNvSpPr>
-            <a:spLocks noGrp="1"/>
-          </p:cNvSpPr>
-          <p:nvPr>
-            <p:ph type="sldNum" idx="5" sz="quarter"/>
+            <p:ph type="sldNum" sz="quarter" idx="5"/>
           </p:nvPr>
         </p:nvSpPr>
         <p:spPr/>
@@ -675,7 +469,7 @@
 </file>
 
 <file path=ppt/notesSlides/notesSlide4.xml><?xml version="1.0" encoding="utf-8"?>
-<p:notes xmlns:a="http://schemas.openxmlformats.org/drawingml/2006/main" xmlns:p="http://schemas.openxmlformats.org/presentationml/2006/main" xmlns:r="http://schemas.openxmlformats.org/officeDocument/2006/relationships">
+<p:notes xmlns:a="http://schemas.openxmlformats.org/drawingml/2006/main" xmlns:r="http://schemas.openxmlformats.org/officeDocument/2006/relationships" xmlns:p="http://schemas.openxmlformats.org/presentationml/2006/main">
   <p:cSld>
     <p:spTree>
       <p:nvGrpSpPr>
@@ -695,43 +489,43 @@
         <p:nvSpPr>
           <p:cNvPr id="2" name="Slide Image Placeholder 1"/>
           <p:cNvSpPr>
+            <a:spLocks noGrp="1" noRot="1" noChangeAspect="1"/>
+          </p:cNvSpPr>
+          <p:nvPr>
+            <p:ph type="sldImg" idx="2"/>
+          </p:nvPr>
+        </p:nvSpPr>
+        <p:spPr/>
+      </p:sp>
+      <p:sp>
+        <p:nvSpPr>
+          <p:cNvPr id="3" name="Notes Placeholder 2"/>
+          <p:cNvSpPr>
             <a:spLocks noGrp="1"/>
           </p:cNvSpPr>
           <p:nvPr>
-            <p:ph type="sldImg" idx="2"/>
+            <p:ph type="body" sz="quarter" idx="3"/>
           </p:nvPr>
         </p:nvSpPr>
         <p:spPr/>
-      </p:sp>
-      <p:sp>
-        <p:nvSpPr>
-          <p:cNvPr id="3" name="Notes Placeholder 2"/>
+        <p:txBody>
+          <a:bodyPr/>
+          <a:lstStyle/>
+          <a:p>
+            <a:r>
+              <a:t>แนวคิดการเล็งครับ เราติดกล้องไว้กับลำกล้อง กล้องหันไปพร้อมป้อมเสมอ การเล็งจึงกลายเป็นการลดระยะห่างระหว่างเป้ากับจุดเล็งบนภาพให้เหลือศูนย์ ไม่ต้องวัดระยะถึงเป้าเลย ตัวคุมเป็น P controller ค่าเกน 0.03 องศาต่อพิกเซล จำกัดก้าวละไม่เกิน 6 องศากันเหวี่ยงเกิน และต้องอยู่ในกรอบ 15 พิกเซลติดกันสามเฟรม ระบบถึงจะประกาศว่าพร้อมยิง</a:t>
+            </a:r>
+          </a:p>
+        </p:txBody>
+      </p:sp>
+      <p:sp>
+        <p:nvSpPr>
+          <p:cNvPr id="4" name="Slide Number Placeholder 3"/>
           <p:cNvSpPr>
             <a:spLocks noGrp="1"/>
           </p:cNvSpPr>
           <p:nvPr>
-            <p:ph type="body" idx="3" sz="quarter"/>
-          </p:nvPr>
-        </p:nvSpPr>
-        <p:spPr/>
-        <p:txBody>
-          <a:bodyPr/>
-          <a:lstStyle/>
-          <a:p>
-            <a:r>
-              <a:t>แนวคิดการเล็งครับ เราติดกล้องไว้กับลำกล้อง กล้องหันไปพร้อมป้อมเสมอ การเล็งจึงกลายเป็นการลดระยะห่างระหว่างเป้ากับจุดเล็งบนภาพให้เหลือศูนย์ ไม่ต้องวัดระยะถึงเป้าเลย ตัวคุมเป็น P controller ค่าเกน 0.03 องศาต่อพิกเซล จำกัดก้าวละไม่เกิน 6 องศากันเหวี่ยงเกิน และต้องอยู่ในกรอบ 15 พิกเซลติดกันสามเฟรม ระบบถึงจะประกาศว่าพร้อมยิง</a:t>
-            </a:r>
-          </a:p>
-        </p:txBody>
-      </p:sp>
-      <p:sp>
-        <p:nvSpPr>
-          <p:cNvPr id="4" name="Slide Number Placeholder 3"/>
-          <p:cNvSpPr>
-            <a:spLocks noGrp="1"/>
-          </p:cNvSpPr>
-          <p:nvPr>
-            <p:ph type="sldNum" idx="5" sz="quarter"/>
+            <p:ph type="sldNum" sz="quarter" idx="5"/>
           </p:nvPr>
         </p:nvSpPr>
         <p:spPr/>
@@ -745,7 +539,7 @@
 </file>
 
 <file path=ppt/notesSlides/notesSlide5.xml><?xml version="1.0" encoding="utf-8"?>
-<p:notes xmlns:a="http://schemas.openxmlformats.org/drawingml/2006/main" xmlns:p="http://schemas.openxmlformats.org/presentationml/2006/main" xmlns:r="http://schemas.openxmlformats.org/officeDocument/2006/relationships">
+<p:notes xmlns:a="http://schemas.openxmlformats.org/drawingml/2006/main" xmlns:r="http://schemas.openxmlformats.org/officeDocument/2006/relationships" xmlns:p="http://schemas.openxmlformats.org/presentationml/2006/main">
   <p:cSld>
     <p:spTree>
       <p:nvGrpSpPr>
@@ -765,43 +559,43 @@
         <p:nvSpPr>
           <p:cNvPr id="2" name="Slide Image Placeholder 1"/>
           <p:cNvSpPr>
+            <a:spLocks noGrp="1" noRot="1" noChangeAspect="1"/>
+          </p:cNvSpPr>
+          <p:nvPr>
+            <p:ph type="sldImg" idx="2"/>
+          </p:nvPr>
+        </p:nvSpPr>
+        <p:spPr/>
+      </p:sp>
+      <p:sp>
+        <p:nvSpPr>
+          <p:cNvPr id="3" name="Notes Placeholder 2"/>
+          <p:cNvSpPr>
             <a:spLocks noGrp="1"/>
           </p:cNvSpPr>
           <p:nvPr>
-            <p:ph type="sldImg" idx="2"/>
+            <p:ph type="body" sz="quarter" idx="3"/>
           </p:nvPr>
         </p:nvSpPr>
         <p:spPr/>
-      </p:sp>
-      <p:sp>
-        <p:nvSpPr>
-          <p:cNvPr id="3" name="Notes Placeholder 2"/>
+        <p:txBody>
+          <a:bodyPr/>
+          <a:lstStyle/>
+          <a:p>
+            <a:r>
+              <a:t>ฝั่งวงจรครับ แบตเตอรี่ 18650 สองก้อนอนุกรมได้ 7.4 โวลต์ แยกสองทาง ทางแรกเข้า L298N ซึ่งเป็นวงจร H-bridge คุมความเร็วมอเตอร์ด้วย PWM ที่ขา ENA ENB และคุมทิศด้วยขา IN หนึ่งถึงสี่ ทางที่สองผ่าน buck ลดเหลือ 6 โวลต์เลี้ยงเซอร์โวแยกต่างหาก เพราะถ้าดึงจากไฟ USB ของ Arduino บอร์ดจะรีเซ็ตตัวเอง กราวด์ทุกส่วนต่อร่วมกัน ส่วนทฤษฎีที่ใช้แปลงภาพเป็นมุมคือแบบจำลองกล้องรูเข็ม มุมเท่ากับอาร์กแทนเจนต์ของระยะพิกเซลหารความยาวโฟกัส ซึ่งเราวัดได้ 1400 พิกเซล</a:t>
+            </a:r>
+          </a:p>
+        </p:txBody>
+      </p:sp>
+      <p:sp>
+        <p:nvSpPr>
+          <p:cNvPr id="4" name="Slide Number Placeholder 3"/>
           <p:cNvSpPr>
             <a:spLocks noGrp="1"/>
           </p:cNvSpPr>
           <p:nvPr>
-            <p:ph type="body" idx="3" sz="quarter"/>
-          </p:nvPr>
-        </p:nvSpPr>
-        <p:spPr/>
-        <p:txBody>
-          <a:bodyPr/>
-          <a:lstStyle/>
-          <a:p>
-            <a:r>
-              <a:t>ฝั่งวงจรครับ แบตเตอรี่ 18650 สองก้อนอนุกรมได้ 7.4 โวลต์ แยกสองทาง ทางแรกเข้า L298N ซึ่งเป็นวงจร H-bridge คุมความเร็วมอเตอร์ด้วย PWM ที่ขา ENA ENB และคุมทิศด้วยขา IN หนึ่งถึงสี่ ทางที่สองผ่าน buck ลดเหลือ 6 โวลต์เลี้ยงเซอร์โวแยกต่างหาก เพราะถ้าดึงจากไฟ USB ของ Arduino บอร์ดจะรีเซ็ตตัวเอง กราวด์ทุกส่วนต่อร่วมกัน ส่วนทฤษฎีที่ใช้แปลงภาพเป็นมุมคือแบบจำลองกล้องรูเข็ม มุมเท่ากับอาร์กแทนเจนต์ของระยะพิกเซลหารความยาวโฟกัส ซึ่งเราวัดได้ 1400 พิกเซล</a:t>
-            </a:r>
-          </a:p>
-        </p:txBody>
-      </p:sp>
-      <p:sp>
-        <p:nvSpPr>
-          <p:cNvPr id="4" name="Slide Number Placeholder 3"/>
-          <p:cNvSpPr>
-            <a:spLocks noGrp="1"/>
-          </p:cNvSpPr>
-          <p:nvPr>
-            <p:ph type="sldNum" idx="5" sz="quarter"/>
+            <p:ph type="sldNum" sz="quarter" idx="5"/>
           </p:nvPr>
         </p:nvSpPr>
         <p:spPr/>
@@ -815,7 +609,7 @@
 </file>
 
 <file path=ppt/notesSlides/notesSlide6.xml><?xml version="1.0" encoding="utf-8"?>
-<p:notes xmlns:a="http://schemas.openxmlformats.org/drawingml/2006/main" xmlns:p="http://schemas.openxmlformats.org/presentationml/2006/main" xmlns:r="http://schemas.openxmlformats.org/officeDocument/2006/relationships">
+<p:notes xmlns:a="http://schemas.openxmlformats.org/drawingml/2006/main" xmlns:r="http://schemas.openxmlformats.org/officeDocument/2006/relationships" xmlns:p="http://schemas.openxmlformats.org/presentationml/2006/main">
   <p:cSld>
     <p:spTree>
       <p:nvGrpSpPr>
@@ -835,43 +629,43 @@
         <p:nvSpPr>
           <p:cNvPr id="2" name="Slide Image Placeholder 1"/>
           <p:cNvSpPr>
+            <a:spLocks noGrp="1" noRot="1" noChangeAspect="1"/>
+          </p:cNvSpPr>
+          <p:nvPr>
+            <p:ph type="sldImg" idx="2"/>
+          </p:nvPr>
+        </p:nvSpPr>
+        <p:spPr/>
+      </p:sp>
+      <p:sp>
+        <p:nvSpPr>
+          <p:cNvPr id="3" name="Notes Placeholder 2"/>
+          <p:cNvSpPr>
             <a:spLocks noGrp="1"/>
           </p:cNvSpPr>
           <p:nvPr>
-            <p:ph type="sldImg" idx="2"/>
+            <p:ph type="body" sz="quarter" idx="3"/>
           </p:nvPr>
         </p:nvSpPr>
         <p:spPr/>
-      </p:sp>
-      <p:sp>
-        <p:nvSpPr>
-          <p:cNvPr id="3" name="Notes Placeholder 2"/>
+        <p:txBody>
+          <a:bodyPr/>
+          <a:lstStyle/>
+          <a:p>
+            <a:r>
+              <a:t>รายการคำนวณการเคลื่อนที่กระสุนครับ เราใช้สมการโพรเจกไทล์มาตรฐาน แกนราบความเร็วคงที่ แกนดิ่งมีความเร่งโน้มถ่วง เป้าอยู่สูงกว่าปากกระบอก 0.4 เมตรตามระยะสนามที่โจทย์กำหนด แก้สมการหาความเร็วต้นที่ต้องใช้ ได้ผลสามข้อ — หนึ่ง ระยะหนึ่งเมตรครึ่งถึงสองเมตรสี่ ต้องการความเร็วลูกแค่ราวห้าถึงหกเมตรต่อวินาที สอง ที่มุม 25 องศา ความเร็วกับระยะไม่เรียงกัน ระยะเดียวได้จากความเร็วสองค่า เราจึงเลือกล็อกมุมเงยที่ 30 ถึง 35 องศาแทน สาม ความเร็วขอบล้อประมาณสองเท่าของความเร็วลูก ล้อเส้นผ่านศูนย์กลาง 50 มิลลิเมตร ต้องหมุนราวสามพันแปดร้อยรอบต่อนาที — ตัวเลขนี้เองที่บอกเราว่ามอเตอร์ที่มีเกียร์ทดเหลือสองร้อยรอบใช้ไม่ได้ ต้องถอดเกียร์ออก</a:t>
+            </a:r>
+          </a:p>
+        </p:txBody>
+      </p:sp>
+      <p:sp>
+        <p:nvSpPr>
+          <p:cNvPr id="4" name="Slide Number Placeholder 3"/>
           <p:cNvSpPr>
             <a:spLocks noGrp="1"/>
           </p:cNvSpPr>
           <p:nvPr>
-            <p:ph type="body" idx="3" sz="quarter"/>
-          </p:nvPr>
-        </p:nvSpPr>
-        <p:spPr/>
-        <p:txBody>
-          <a:bodyPr/>
-          <a:lstStyle/>
-          <a:p>
-            <a:r>
-              <a:t>รายการคำนวณการเคลื่อนที่กระสุนครับ เราใช้สมการโพรเจกไทล์มาตรฐาน แกนราบความเร็วคงที่ แกนดิ่งมีความเร่งโน้มถ่วง เป้าอยู่สูงกว่าปากกระบอก 0.4 เมตรตามระยะสนามที่โจทย์กำหนด แก้สมการหาความเร็วต้นที่ต้องใช้ ได้ผลสามข้อ — หนึ่ง ระยะหนึ่งเมตรครึ่งถึงสองเมตรสี่ ต้องการความเร็วลูกแค่ราวห้าถึงหกเมตรต่อวินาที สอง ที่มุม 25 องศา ความเร็วกับระยะไม่เรียงกัน ระยะเดียวได้จากความเร็วสองค่า เราจึงเลือกล็อกมุมเงยที่ 30 ถึง 35 องศาแทน สาม ความเร็วขอบล้อประมาณสองเท่าของความเร็วลูก ล้อเส้นผ่านศูนย์กลาง 50 มิลลิเมตร ต้องหมุนราวสามพันแปดร้อยรอบต่อนาที — ตัวเลขนี้เองที่บอกเราว่ามอเตอร์ที่มีเกียร์ทดเหลือสองร้อยรอบใช้ไม่ได้ ต้องถอดเกียร์ออก</a:t>
-            </a:r>
-          </a:p>
-        </p:txBody>
-      </p:sp>
-      <p:sp>
-        <p:nvSpPr>
-          <p:cNvPr id="4" name="Slide Number Placeholder 3"/>
-          <p:cNvSpPr>
-            <a:spLocks noGrp="1"/>
-          </p:cNvSpPr>
-          <p:nvPr>
-            <p:ph type="sldNum" idx="5" sz="quarter"/>
+            <p:ph type="sldNum" sz="quarter" idx="5"/>
           </p:nvPr>
         </p:nvSpPr>
         <p:spPr/>
@@ -885,7 +679,7 @@
 </file>
 
 <file path=ppt/notesSlides/notesSlide7.xml><?xml version="1.0" encoding="utf-8"?>
-<p:notes xmlns:a="http://schemas.openxmlformats.org/drawingml/2006/main" xmlns:p="http://schemas.openxmlformats.org/presentationml/2006/main" xmlns:r="http://schemas.openxmlformats.org/officeDocument/2006/relationships">
+<p:notes xmlns:a="http://schemas.openxmlformats.org/drawingml/2006/main" xmlns:r="http://schemas.openxmlformats.org/officeDocument/2006/relationships" xmlns:p="http://schemas.openxmlformats.org/presentationml/2006/main">
   <p:cSld>
     <p:spTree>
       <p:nvGrpSpPr>
@@ -905,49 +699,51 @@
         <p:nvSpPr>
           <p:cNvPr id="2" name="Slide Image Placeholder 1"/>
           <p:cNvSpPr>
+            <a:spLocks noGrp="1" noRot="1" noChangeAspect="1"/>
+          </p:cNvSpPr>
+          <p:nvPr>
+            <p:ph type="sldImg" idx="2"/>
+          </p:nvPr>
+        </p:nvSpPr>
+        <p:spPr/>
+      </p:sp>
+      <p:sp>
+        <p:nvSpPr>
+          <p:cNvPr id="3" name="Notes Placeholder 2"/>
+          <p:cNvSpPr>
             <a:spLocks noGrp="1"/>
           </p:cNvSpPr>
           <p:nvPr>
-            <p:ph type="sldImg" idx="2"/>
+            <p:ph type="body" sz="quarter" idx="3"/>
           </p:nvPr>
         </p:nvSpPr>
         <p:spPr/>
-      </p:sp>
-      <p:sp>
-        <p:nvSpPr>
-          <p:cNvPr id="3" name="Notes Placeholder 2"/>
+        <p:txBody>
+          <a:bodyPr/>
+          <a:lstStyle/>
+          <a:p>
+            <a:r>
+              <a:t>ฝั่งการมองเห็นครับ เราเก็บชุดข้อมูลเอง 3,333 ภาพ ปัญหาที่เจอคือโมเดลมองถุงพลาสติกเป็นคาปิบาร่าด้วยความมั่นใจ 0.83 สาเหตุคือชุดวัดผลไม่มีภาพพื้นหลังเปล่าเลย แปลว่าเราวัดการมองมั่วไม่ได้ตั้งแต่ต้น เราเก็บภาพพื้นหลังเพิ่มแล้วเทรนใหม่ อัตรามองมั่วบนห้องที่โมเดลไม่เคยเห็นลดจาก 8 เปอร์เซ็นต์เหลือ 1.1 โดยความไวไม่ตก</a:t>
+            </a:r>
+          </a:p>
+          <a:p>
+            <a:endParaRPr/>
+          </a:p>
+          <a:p>
+            <a:r>
+              <a:t>*** ห้ามพูดว่าเป็นตัวเลขของห้องแข่ง — พูดได้แค่ 'ห้องที่โมเดลไม่เคยเห็น' ***</a:t>
+            </a:r>
+          </a:p>
+        </p:txBody>
+      </p:sp>
+      <p:sp>
+        <p:nvSpPr>
+          <p:cNvPr id="4" name="Slide Number Placeholder 3"/>
           <p:cNvSpPr>
             <a:spLocks noGrp="1"/>
           </p:cNvSpPr>
           <p:nvPr>
-            <p:ph type="body" idx="3" sz="quarter"/>
-          </p:nvPr>
-        </p:nvSpPr>
-        <p:spPr/>
-        <p:txBody>
-          <a:bodyPr/>
-          <a:lstStyle/>
-          <a:p>
-            <a:r>
-              <a:t>ฝั่งการมองเห็นครับ เราเก็บชุดข้อมูลเอง 3,333 ภาพ ปัญหาที่เจอคือโมเดลมองถุงพลาสติกเป็นคาปิบาร่าด้วยความมั่นใจ 0.83 สาเหตุคือชุดวัดผลไม่มีภาพพื้นหลังเปล่าเลย แปลว่าเราวัดการมองมั่วไม่ได้ตั้งแต่ต้น เราเก็บภาพพื้นหลังเพิ่มแล้วเทรนใหม่ อัตรามองมั่วบนห้องที่โมเดลไม่เคยเห็นลดจาก 8 เปอร์เซ็นต์เหลือ 1.1 โดยความไวไม่ตก</a:t>
-            </a:r>
-          </a:p>
-          <a:p/>
-          <a:p>
-            <a:r>
-              <a:t>*** ห้ามพูดว่าเป็นตัวเลขของห้องแข่ง — พูดได้แค่ 'ห้องที่โมเดลไม่เคยเห็น' ***</a:t>
-            </a:r>
-          </a:p>
-        </p:txBody>
-      </p:sp>
-      <p:sp>
-        <p:nvSpPr>
-          <p:cNvPr id="4" name="Slide Number Placeholder 3"/>
-          <p:cNvSpPr>
-            <a:spLocks noGrp="1"/>
-          </p:cNvSpPr>
-          <p:nvPr>
-            <p:ph type="sldNum" idx="5" sz="quarter"/>
+            <p:ph type="sldNum" sz="quarter" idx="5"/>
           </p:nvPr>
         </p:nvSpPr>
         <p:spPr/>
@@ -961,7 +757,7 @@
 </file>
 
 <file path=ppt/notesSlides/notesSlide8.xml><?xml version="1.0" encoding="utf-8"?>
-<p:notes xmlns:a="http://schemas.openxmlformats.org/drawingml/2006/main" xmlns:p="http://schemas.openxmlformats.org/presentationml/2006/main" xmlns:r="http://schemas.openxmlformats.org/officeDocument/2006/relationships">
+<p:notes xmlns:a="http://schemas.openxmlformats.org/drawingml/2006/main" xmlns:r="http://schemas.openxmlformats.org/officeDocument/2006/relationships" xmlns:p="http://schemas.openxmlformats.org/presentationml/2006/main">
   <p:cSld>
     <p:spTree>
       <p:nvGrpSpPr>
@@ -981,43 +777,43 @@
         <p:nvSpPr>
           <p:cNvPr id="2" name="Slide Image Placeholder 1"/>
           <p:cNvSpPr>
+            <a:spLocks noGrp="1" noRot="1" noChangeAspect="1"/>
+          </p:cNvSpPr>
+          <p:nvPr>
+            <p:ph type="sldImg" idx="2"/>
+          </p:nvPr>
+        </p:nvSpPr>
+        <p:spPr/>
+      </p:sp>
+      <p:sp>
+        <p:nvSpPr>
+          <p:cNvPr id="3" name="Notes Placeholder 2"/>
+          <p:cNvSpPr>
             <a:spLocks noGrp="1"/>
           </p:cNvSpPr>
           <p:nvPr>
-            <p:ph type="sldImg" idx="2"/>
+            <p:ph type="body" sz="quarter" idx="3"/>
           </p:nvPr>
         </p:nvSpPr>
         <p:spPr/>
-      </p:sp>
-      <p:sp>
-        <p:nvSpPr>
-          <p:cNvPr id="3" name="Notes Placeholder 2"/>
+        <p:txBody>
+          <a:bodyPr/>
+          <a:lstStyle/>
+          <a:p>
+            <a:r>
+              <a:t>สุดท้ายคือส่วนติดต่อผู้ใช้ครับ ผู้ใช้คลิกที่ตุ๊กตาตัวไหนก็ได้ในสามตัว ป้อมจะหันไปล็อกตัวนั้น กด F ยิง และมีปุ่ม G หยุดล้อฉุกเฉินที่กดได้ทุกสถานะ พร้อมสาธิตแล้วครับ ขอบคุณครับ</a:t>
+            </a:r>
+          </a:p>
+        </p:txBody>
+      </p:sp>
+      <p:sp>
+        <p:nvSpPr>
+          <p:cNvPr id="4" name="Slide Number Placeholder 3"/>
           <p:cNvSpPr>
             <a:spLocks noGrp="1"/>
           </p:cNvSpPr>
           <p:nvPr>
-            <p:ph type="body" idx="3" sz="quarter"/>
-          </p:nvPr>
-        </p:nvSpPr>
-        <p:spPr/>
-        <p:txBody>
-          <a:bodyPr/>
-          <a:lstStyle/>
-          <a:p>
-            <a:r>
-              <a:t>สุดท้ายคือส่วนติดต่อผู้ใช้ครับ ผู้ใช้คลิกที่ตุ๊กตาตัวไหนก็ได้ในสามตัว ป้อมจะหันไปล็อกตัวนั้น กด F ยิง และมีปุ่ม G หยุดล้อฉุกเฉินที่กดได้ทุกสถานะ พร้อมสาธิตแล้วครับ ขอบคุณครับ</a:t>
-            </a:r>
-          </a:p>
-        </p:txBody>
-      </p:sp>
-      <p:sp>
-        <p:nvSpPr>
-          <p:cNvPr id="4" name="Slide Number Placeholder 3"/>
-          <p:cNvSpPr>
-            <a:spLocks noGrp="1"/>
-          </p:cNvSpPr>
-          <p:nvPr>
-            <p:ph type="sldNum" idx="5" sz="quarter"/>
+            <p:ph type="sldNum" sz="quarter" idx="5"/>
           </p:nvPr>
         </p:nvSpPr>
         <p:spPr/>
@@ -1068,10 +864,9 @@
           <a:lstStyle/>
           <a:p>
             <a:r>
-              <a:rPr lang="en-US" smtClean="0"/>
+              <a:rPr lang="en-US"/>
               <a:t>Click to edit Master title style</a:t>
             </a:r>
-            <a:endParaRPr lang="en-US"/>
           </a:p>
         </p:txBody>
       </p:sp>
@@ -1187,10 +982,9 @@
           </a:lstStyle>
           <a:p>
             <a:r>
-              <a:rPr lang="en-US" smtClean="0"/>
+              <a:rPr lang="en-US"/>
               <a:t>Click to edit Master subtitle style</a:t>
             </a:r>
-            <a:endParaRPr lang="en-US"/>
           </a:p>
         </p:txBody>
       </p:sp>
@@ -1211,7 +1005,7 @@
           <a:p>
             <a:fld id="{5BCAD085-E8A6-8845-BD4E-CB4CCA059FC4}" type="datetimeFigureOut">
               <a:rPr lang="en-US" smtClean="0"/>
-              <a:t>1/27/13</a:t>
+              <a:t>7/30/2026</a:t>
             </a:fld>
             <a:endParaRPr lang="en-US"/>
           </a:p>
@@ -1305,10 +1099,9 @@
           <a:lstStyle/>
           <a:p>
             <a:r>
-              <a:rPr lang="en-US" smtClean="0"/>
+              <a:rPr lang="en-US"/>
               <a:t>Click to edit Master title style</a:t>
             </a:r>
-            <a:endParaRPr lang="en-US"/>
           </a:p>
         </p:txBody>
       </p:sp>
@@ -1329,38 +1122,37 @@
           <a:p>
             <a:pPr lvl="0"/>
             <a:r>
-              <a:rPr lang="en-US" smtClean="0"/>
+              <a:rPr lang="en-US"/>
               <a:t>Click to edit Master text styles</a:t>
             </a:r>
           </a:p>
           <a:p>
             <a:pPr lvl="1"/>
             <a:r>
-              <a:rPr lang="en-US" smtClean="0"/>
+              <a:rPr lang="en-US"/>
               <a:t>Second level</a:t>
             </a:r>
           </a:p>
           <a:p>
             <a:pPr lvl="2"/>
             <a:r>
-              <a:rPr lang="en-US" smtClean="0"/>
+              <a:rPr lang="en-US"/>
               <a:t>Third level</a:t>
             </a:r>
           </a:p>
           <a:p>
             <a:pPr lvl="3"/>
             <a:r>
-              <a:rPr lang="en-US" smtClean="0"/>
+              <a:rPr lang="en-US"/>
               <a:t>Fourth level</a:t>
             </a:r>
           </a:p>
           <a:p>
             <a:pPr lvl="4"/>
             <a:r>
-              <a:rPr lang="en-US" smtClean="0"/>
+              <a:rPr lang="en-US"/>
               <a:t>Fifth level</a:t>
             </a:r>
-            <a:endParaRPr lang="en-US"/>
           </a:p>
         </p:txBody>
       </p:sp>
@@ -1381,7 +1173,7 @@
           <a:p>
             <a:fld id="{5BCAD085-E8A6-8845-BD4E-CB4CCA059FC4}" type="datetimeFigureOut">
               <a:rPr lang="en-US" smtClean="0"/>
-              <a:t>1/27/13</a:t>
+              <a:t>7/30/2026</a:t>
             </a:fld>
             <a:endParaRPr lang="en-US"/>
           </a:p>
@@ -1480,10 +1272,9 @@
           <a:lstStyle/>
           <a:p>
             <a:r>
-              <a:rPr lang="en-US" smtClean="0"/>
+              <a:rPr lang="en-US"/>
               <a:t>Click to edit Master title style</a:t>
             </a:r>
-            <a:endParaRPr lang="en-US"/>
           </a:p>
         </p:txBody>
       </p:sp>
@@ -1509,38 +1300,37 @@
           <a:p>
             <a:pPr lvl="0"/>
             <a:r>
-              <a:rPr lang="en-US" smtClean="0"/>
+              <a:rPr lang="en-US"/>
               <a:t>Click to edit Master text styles</a:t>
             </a:r>
           </a:p>
           <a:p>
             <a:pPr lvl="1"/>
             <a:r>
-              <a:rPr lang="en-US" smtClean="0"/>
+              <a:rPr lang="en-US"/>
               <a:t>Second level</a:t>
             </a:r>
           </a:p>
           <a:p>
             <a:pPr lvl="2"/>
             <a:r>
-              <a:rPr lang="en-US" smtClean="0"/>
+              <a:rPr lang="en-US"/>
               <a:t>Third level</a:t>
             </a:r>
           </a:p>
           <a:p>
             <a:pPr lvl="3"/>
             <a:r>
-              <a:rPr lang="en-US" smtClean="0"/>
+              <a:rPr lang="en-US"/>
               <a:t>Fourth level</a:t>
             </a:r>
           </a:p>
           <a:p>
             <a:pPr lvl="4"/>
             <a:r>
-              <a:rPr lang="en-US" smtClean="0"/>
+              <a:rPr lang="en-US"/>
               <a:t>Fifth level</a:t>
             </a:r>
-            <a:endParaRPr lang="en-US"/>
           </a:p>
         </p:txBody>
       </p:sp>
@@ -1561,7 +1351,7 @@
           <a:p>
             <a:fld id="{5BCAD085-E8A6-8845-BD4E-CB4CCA059FC4}" type="datetimeFigureOut">
               <a:rPr lang="en-US" smtClean="0"/>
-              <a:t>1/27/13</a:t>
+              <a:t>7/30/2026</a:t>
             </a:fld>
             <a:endParaRPr lang="en-US"/>
           </a:p>
@@ -1655,10 +1445,9 @@
           <a:lstStyle/>
           <a:p>
             <a:r>
-              <a:rPr lang="en-US" smtClean="0"/>
+              <a:rPr lang="en-US"/>
               <a:t>Click to edit Master title style</a:t>
             </a:r>
-            <a:endParaRPr lang="en-US"/>
           </a:p>
         </p:txBody>
       </p:sp>
@@ -1679,38 +1468,37 @@
           <a:p>
             <a:pPr lvl="0"/>
             <a:r>
-              <a:rPr lang="en-US" smtClean="0"/>
+              <a:rPr lang="en-US"/>
               <a:t>Click to edit Master text styles</a:t>
             </a:r>
           </a:p>
           <a:p>
             <a:pPr lvl="1"/>
             <a:r>
-              <a:rPr lang="en-US" smtClean="0"/>
+              <a:rPr lang="en-US"/>
               <a:t>Second level</a:t>
             </a:r>
           </a:p>
           <a:p>
             <a:pPr lvl="2"/>
             <a:r>
-              <a:rPr lang="en-US" smtClean="0"/>
+              <a:rPr lang="en-US"/>
               <a:t>Third level</a:t>
             </a:r>
           </a:p>
           <a:p>
             <a:pPr lvl="3"/>
             <a:r>
-              <a:rPr lang="en-US" smtClean="0"/>
+              <a:rPr lang="en-US"/>
               <a:t>Fourth level</a:t>
             </a:r>
           </a:p>
           <a:p>
             <a:pPr lvl="4"/>
             <a:r>
-              <a:rPr lang="en-US" smtClean="0"/>
+              <a:rPr lang="en-US"/>
               <a:t>Fifth level</a:t>
             </a:r>
-            <a:endParaRPr lang="en-US"/>
           </a:p>
         </p:txBody>
       </p:sp>
@@ -1731,7 +1519,7 @@
           <a:p>
             <a:fld id="{5BCAD085-E8A6-8845-BD4E-CB4CCA059FC4}" type="datetimeFigureOut">
               <a:rPr lang="en-US" smtClean="0"/>
-              <a:t>1/27/13</a:t>
+              <a:t>7/30/2026</a:t>
             </a:fld>
             <a:endParaRPr lang="en-US"/>
           </a:p>
@@ -1834,10 +1622,9 @@
           </a:lstStyle>
           <a:p>
             <a:r>
-              <a:rPr lang="en-US" smtClean="0"/>
+              <a:rPr lang="en-US"/>
               <a:t>Click to edit Master title style</a:t>
             </a:r>
-            <a:endParaRPr lang="en-US"/>
           </a:p>
         </p:txBody>
       </p:sp>
@@ -1954,7 +1741,7 @@
           <a:p>
             <a:pPr lvl="0"/>
             <a:r>
-              <a:rPr lang="en-US" smtClean="0"/>
+              <a:rPr lang="en-US"/>
               <a:t>Click to edit Master text styles</a:t>
             </a:r>
           </a:p>
@@ -1977,7 +1764,7 @@
           <a:p>
             <a:fld id="{5BCAD085-E8A6-8845-BD4E-CB4CCA059FC4}" type="datetimeFigureOut">
               <a:rPr lang="en-US" smtClean="0"/>
-              <a:t>1/27/13</a:t>
+              <a:t>7/30/2026</a:t>
             </a:fld>
             <a:endParaRPr lang="en-US"/>
           </a:p>
@@ -2071,10 +1858,9 @@
           <a:lstStyle/>
           <a:p>
             <a:r>
-              <a:rPr lang="en-US" smtClean="0"/>
+              <a:rPr lang="en-US"/>
               <a:t>Click to edit Master title style</a:t>
             </a:r>
-            <a:endParaRPr lang="en-US"/>
           </a:p>
         </p:txBody>
       </p:sp>
@@ -2128,38 +1914,37 @@
           <a:p>
             <a:pPr lvl="0"/>
             <a:r>
-              <a:rPr lang="en-US" smtClean="0"/>
+              <a:rPr lang="en-US"/>
               <a:t>Click to edit Master text styles</a:t>
             </a:r>
           </a:p>
           <a:p>
             <a:pPr lvl="1"/>
             <a:r>
-              <a:rPr lang="en-US" smtClean="0"/>
+              <a:rPr lang="en-US"/>
               <a:t>Second level</a:t>
             </a:r>
           </a:p>
           <a:p>
             <a:pPr lvl="2"/>
             <a:r>
-              <a:rPr lang="en-US" smtClean="0"/>
+              <a:rPr lang="en-US"/>
               <a:t>Third level</a:t>
             </a:r>
           </a:p>
           <a:p>
             <a:pPr lvl="3"/>
             <a:r>
-              <a:rPr lang="en-US" smtClean="0"/>
+              <a:rPr lang="en-US"/>
               <a:t>Fourth level</a:t>
             </a:r>
           </a:p>
           <a:p>
             <a:pPr lvl="4"/>
             <a:r>
-              <a:rPr lang="en-US" smtClean="0"/>
+              <a:rPr lang="en-US"/>
               <a:t>Fifth level</a:t>
             </a:r>
-            <a:endParaRPr lang="en-US"/>
           </a:p>
         </p:txBody>
       </p:sp>
@@ -2213,38 +1998,37 @@
           <a:p>
             <a:pPr lvl="0"/>
             <a:r>
-              <a:rPr lang="en-US" smtClean="0"/>
+              <a:rPr lang="en-US"/>
               <a:t>Click to edit Master text styles</a:t>
             </a:r>
           </a:p>
           <a:p>
             <a:pPr lvl="1"/>
             <a:r>
-              <a:rPr lang="en-US" smtClean="0"/>
+              <a:rPr lang="en-US"/>
               <a:t>Second level</a:t>
             </a:r>
           </a:p>
           <a:p>
             <a:pPr lvl="2"/>
             <a:r>
-              <a:rPr lang="en-US" smtClean="0"/>
+              <a:rPr lang="en-US"/>
               <a:t>Third level</a:t>
             </a:r>
           </a:p>
           <a:p>
             <a:pPr lvl="3"/>
             <a:r>
-              <a:rPr lang="en-US" smtClean="0"/>
+              <a:rPr lang="en-US"/>
               <a:t>Fourth level</a:t>
             </a:r>
           </a:p>
           <a:p>
             <a:pPr lvl="4"/>
             <a:r>
-              <a:rPr lang="en-US" smtClean="0"/>
+              <a:rPr lang="en-US"/>
               <a:t>Fifth level</a:t>
             </a:r>
-            <a:endParaRPr lang="en-US"/>
           </a:p>
         </p:txBody>
       </p:sp>
@@ -2265,7 +2049,7 @@
           <a:p>
             <a:fld id="{5BCAD085-E8A6-8845-BD4E-CB4CCA059FC4}" type="datetimeFigureOut">
               <a:rPr lang="en-US" smtClean="0"/>
-              <a:t>1/27/13</a:t>
+              <a:t>7/30/2026</a:t>
             </a:fld>
             <a:endParaRPr lang="en-US"/>
           </a:p>
@@ -2363,10 +2147,9 @@
           </a:lstStyle>
           <a:p>
             <a:r>
-              <a:rPr lang="en-US" smtClean="0"/>
+              <a:rPr lang="en-US"/>
               <a:t>Click to edit Master title style</a:t>
             </a:r>
-            <a:endParaRPr lang="en-US"/>
           </a:p>
         </p:txBody>
       </p:sp>
@@ -2429,7 +2212,7 @@
           <a:p>
             <a:pPr lvl="0"/>
             <a:r>
-              <a:rPr lang="en-US" smtClean="0"/>
+              <a:rPr lang="en-US"/>
               <a:t>Click to edit Master text styles</a:t>
             </a:r>
           </a:p>
@@ -2485,38 +2268,37 @@
           <a:p>
             <a:pPr lvl="0"/>
             <a:r>
-              <a:rPr lang="en-US" smtClean="0"/>
+              <a:rPr lang="en-US"/>
               <a:t>Click to edit Master text styles</a:t>
             </a:r>
           </a:p>
           <a:p>
             <a:pPr lvl="1"/>
             <a:r>
-              <a:rPr lang="en-US" smtClean="0"/>
+              <a:rPr lang="en-US"/>
               <a:t>Second level</a:t>
             </a:r>
           </a:p>
           <a:p>
             <a:pPr lvl="2"/>
             <a:r>
-              <a:rPr lang="en-US" smtClean="0"/>
+              <a:rPr lang="en-US"/>
               <a:t>Third level</a:t>
             </a:r>
           </a:p>
           <a:p>
             <a:pPr lvl="3"/>
             <a:r>
-              <a:rPr lang="en-US" smtClean="0"/>
+              <a:rPr lang="en-US"/>
               <a:t>Fourth level</a:t>
             </a:r>
           </a:p>
           <a:p>
             <a:pPr lvl="4"/>
             <a:r>
-              <a:rPr lang="en-US" smtClean="0"/>
+              <a:rPr lang="en-US"/>
               <a:t>Fifth level</a:t>
             </a:r>
-            <a:endParaRPr lang="en-US"/>
           </a:p>
         </p:txBody>
       </p:sp>
@@ -2579,7 +2361,7 @@
           <a:p>
             <a:pPr lvl="0"/>
             <a:r>
-              <a:rPr lang="en-US" smtClean="0"/>
+              <a:rPr lang="en-US"/>
               <a:t>Click to edit Master text styles</a:t>
             </a:r>
           </a:p>
@@ -2635,38 +2417,37 @@
           <a:p>
             <a:pPr lvl="0"/>
             <a:r>
-              <a:rPr lang="en-US" smtClean="0"/>
+              <a:rPr lang="en-US"/>
               <a:t>Click to edit Master text styles</a:t>
             </a:r>
           </a:p>
           <a:p>
             <a:pPr lvl="1"/>
             <a:r>
-              <a:rPr lang="en-US" smtClean="0"/>
+              <a:rPr lang="en-US"/>
               <a:t>Second level</a:t>
             </a:r>
           </a:p>
           <a:p>
             <a:pPr lvl="2"/>
             <a:r>
-              <a:rPr lang="en-US" smtClean="0"/>
+              <a:rPr lang="en-US"/>
               <a:t>Third level</a:t>
             </a:r>
           </a:p>
           <a:p>
             <a:pPr lvl="3"/>
             <a:r>
-              <a:rPr lang="en-US" smtClean="0"/>
+              <a:rPr lang="en-US"/>
               <a:t>Fourth level</a:t>
             </a:r>
           </a:p>
           <a:p>
             <a:pPr lvl="4"/>
             <a:r>
-              <a:rPr lang="en-US" smtClean="0"/>
+              <a:rPr lang="en-US"/>
               <a:t>Fifth level</a:t>
             </a:r>
-            <a:endParaRPr lang="en-US"/>
           </a:p>
         </p:txBody>
       </p:sp>
@@ -2687,7 +2468,7 @@
           <a:p>
             <a:fld id="{5BCAD085-E8A6-8845-BD4E-CB4CCA059FC4}" type="datetimeFigureOut">
               <a:rPr lang="en-US" smtClean="0"/>
-              <a:t>1/27/13</a:t>
+              <a:t>7/30/2026</a:t>
             </a:fld>
             <a:endParaRPr lang="en-US"/>
           </a:p>
@@ -2781,10 +2562,9 @@
           <a:lstStyle/>
           <a:p>
             <a:r>
-              <a:rPr lang="en-US" smtClean="0"/>
+              <a:rPr lang="en-US"/>
               <a:t>Click to edit Master title style</a:t>
             </a:r>
-            <a:endParaRPr lang="en-US"/>
           </a:p>
         </p:txBody>
       </p:sp>
@@ -2805,7 +2585,7 @@
           <a:p>
             <a:fld id="{5BCAD085-E8A6-8845-BD4E-CB4CCA059FC4}" type="datetimeFigureOut">
               <a:rPr lang="en-US" smtClean="0"/>
-              <a:t>1/27/13</a:t>
+              <a:t>7/30/2026</a:t>
             </a:fld>
             <a:endParaRPr lang="en-US"/>
           </a:p>
@@ -2900,7 +2680,7 @@
           <a:p>
             <a:fld id="{5BCAD085-E8A6-8845-BD4E-CB4CCA059FC4}" type="datetimeFigureOut">
               <a:rPr lang="en-US" smtClean="0"/>
-              <a:t>1/27/13</a:t>
+              <a:t>7/30/2026</a:t>
             </a:fld>
             <a:endParaRPr lang="en-US"/>
           </a:p>
@@ -3003,10 +2783,9 @@
           </a:lstStyle>
           <a:p>
             <a:r>
-              <a:rPr lang="en-US" smtClean="0"/>
+              <a:rPr lang="en-US"/>
               <a:t>Click to edit Master title style</a:t>
             </a:r>
-            <a:endParaRPr lang="en-US"/>
           </a:p>
         </p:txBody>
       </p:sp>
@@ -3060,38 +2839,37 @@
           <a:p>
             <a:pPr lvl="0"/>
             <a:r>
-              <a:rPr lang="en-US" smtClean="0"/>
+              <a:rPr lang="en-US"/>
               <a:t>Click to edit Master text styles</a:t>
             </a:r>
           </a:p>
           <a:p>
             <a:pPr lvl="1"/>
             <a:r>
-              <a:rPr lang="en-US" smtClean="0"/>
+              <a:rPr lang="en-US"/>
               <a:t>Second level</a:t>
             </a:r>
           </a:p>
           <a:p>
             <a:pPr lvl="2"/>
             <a:r>
-              <a:rPr lang="en-US" smtClean="0"/>
+              <a:rPr lang="en-US"/>
               <a:t>Third level</a:t>
             </a:r>
           </a:p>
           <a:p>
             <a:pPr lvl="3"/>
             <a:r>
-              <a:rPr lang="en-US" smtClean="0"/>
+              <a:rPr lang="en-US"/>
               <a:t>Fourth level</a:t>
             </a:r>
           </a:p>
           <a:p>
             <a:pPr lvl="4"/>
             <a:r>
-              <a:rPr lang="en-US" smtClean="0"/>
+              <a:rPr lang="en-US"/>
               <a:t>Fifth level</a:t>
             </a:r>
-            <a:endParaRPr lang="en-US"/>
           </a:p>
         </p:txBody>
       </p:sp>
@@ -3154,7 +2932,7 @@
           <a:p>
             <a:pPr lvl="0"/>
             <a:r>
-              <a:rPr lang="en-US" smtClean="0"/>
+              <a:rPr lang="en-US"/>
               <a:t>Click to edit Master text styles</a:t>
             </a:r>
           </a:p>
@@ -3177,7 +2955,7 @@
           <a:p>
             <a:fld id="{5BCAD085-E8A6-8845-BD4E-CB4CCA059FC4}" type="datetimeFigureOut">
               <a:rPr lang="en-US" smtClean="0"/>
-              <a:t>1/27/13</a:t>
+              <a:t>7/30/2026</a:t>
             </a:fld>
             <a:endParaRPr lang="en-US"/>
           </a:p>
@@ -3280,10 +3058,9 @@
           </a:lstStyle>
           <a:p>
             <a:r>
-              <a:rPr lang="en-US" smtClean="0"/>
+              <a:rPr lang="en-US"/>
               <a:t>Click to edit Master title style</a:t>
             </a:r>
-            <a:endParaRPr lang="en-US"/>
           </a:p>
         </p:txBody>
       </p:sp>
@@ -3407,7 +3184,7 @@
           <a:p>
             <a:pPr lvl="0"/>
             <a:r>
-              <a:rPr lang="en-US" smtClean="0"/>
+              <a:rPr lang="en-US"/>
               <a:t>Click to edit Master text styles</a:t>
             </a:r>
           </a:p>
@@ -3430,7 +3207,7 @@
           <a:p>
             <a:fld id="{5BCAD085-E8A6-8845-BD4E-CB4CCA059FC4}" type="datetimeFigureOut">
               <a:rPr lang="en-US" smtClean="0"/>
-              <a:t>1/27/13</a:t>
+              <a:t>7/30/2026</a:t>
             </a:fld>
             <a:endParaRPr lang="en-US"/>
           </a:p>
@@ -3539,10 +3316,9 @@
           <a:lstStyle/>
           <a:p>
             <a:r>
-              <a:rPr lang="en-US" smtClean="0"/>
+              <a:rPr lang="en-US"/>
               <a:t>Click to edit Master title style</a:t>
             </a:r>
-            <a:endParaRPr lang="en-US"/>
           </a:p>
         </p:txBody>
       </p:sp>
@@ -3573,38 +3349,37 @@
           <a:p>
             <a:pPr lvl="0"/>
             <a:r>
-              <a:rPr lang="en-US" smtClean="0"/>
+              <a:rPr lang="en-US"/>
               <a:t>Click to edit Master text styles</a:t>
             </a:r>
           </a:p>
           <a:p>
             <a:pPr lvl="1"/>
             <a:r>
-              <a:rPr lang="en-US" smtClean="0"/>
+              <a:rPr lang="en-US"/>
               <a:t>Second level</a:t>
             </a:r>
           </a:p>
           <a:p>
             <a:pPr lvl="2"/>
             <a:r>
-              <a:rPr lang="en-US" smtClean="0"/>
+              <a:rPr lang="en-US"/>
               <a:t>Third level</a:t>
             </a:r>
           </a:p>
           <a:p>
             <a:pPr lvl="3"/>
             <a:r>
-              <a:rPr lang="en-US" smtClean="0"/>
+              <a:rPr lang="en-US"/>
               <a:t>Fourth level</a:t>
             </a:r>
           </a:p>
           <a:p>
             <a:pPr lvl="4"/>
             <a:r>
-              <a:rPr lang="en-US" smtClean="0"/>
+              <a:rPr lang="en-US"/>
               <a:t>Fifth level</a:t>
             </a:r>
-            <a:endParaRPr lang="en-US"/>
           </a:p>
         </p:txBody>
       </p:sp>
@@ -3643,7 +3418,7 @@
           <a:p>
             <a:fld id="{5BCAD085-E8A6-8845-BD4E-CB4CCA059FC4}" type="datetimeFigureOut">
               <a:rPr lang="en-US" smtClean="0"/>
-              <a:t>1/27/13</a:t>
+              <a:t>7/30/2026</a:t>
             </a:fld>
             <a:endParaRPr lang="en-US"/>
           </a:p>
@@ -4002,7 +3777,7 @@
 </file>
 
 <file path=ppt/slides/slide1.xml><?xml version="1.0" encoding="utf-8"?>
-<p:sld xmlns:a="http://schemas.openxmlformats.org/drawingml/2006/main" xmlns:p="http://schemas.openxmlformats.org/presentationml/2006/main" xmlns:r="http://schemas.openxmlformats.org/officeDocument/2006/relationships">
+<p:sld xmlns:a="http://schemas.openxmlformats.org/drawingml/2006/main" xmlns:r="http://schemas.openxmlformats.org/officeDocument/2006/relationships" xmlns:p="http://schemas.openxmlformats.org/presentationml/2006/main">
   <p:cSld>
     <p:bg>
       <p:bgPr>
@@ -4018,7 +3793,14 @@
         <p:cNvGrpSpPr/>
         <p:nvPr/>
       </p:nvGrpSpPr>
-      <p:grpSpPr/>
+      <p:grpSpPr>
+        <a:xfrm>
+          <a:off x="0" y="0"/>
+          <a:ext cx="0" cy="0"/>
+          <a:chOff x="0" y="0"/>
+          <a:chExt cx="0" cy="0"/>
+        </a:xfrm>
+      </p:grpSpPr>
       <p:sp>
         <p:nvSpPr>
           <p:cNvPr id="2" name="Rectangle 1"/>
@@ -4056,10 +3838,11 @@
           </a:fontRef>
         </p:style>
         <p:txBody>
-          <a:bodyPr rtlCol="0" anchor="ctr" wrap="square"/>
+          <a:bodyPr wrap="square" rtlCol="0" anchor="ctr"/>
           <a:lstStyle/>
           <a:p>
             <a:pPr algn="ctr"/>
+            <a:endParaRPr/>
           </a:p>
         </p:txBody>
       </p:sp>
@@ -4080,7 +3863,7 @@
           <a:noFill/>
         </p:spPr>
         <p:txBody>
-          <a:bodyPr wrap="square" anchor="ctr" lIns="0" rIns="0" tIns="0" bIns="0">
+          <a:bodyPr wrap="square" lIns="0" tIns="0" rIns="0" bIns="0" anchor="ctr">
             <a:spAutoFit/>
           </a:bodyPr>
           <a:lstStyle/>
@@ -4100,7 +3883,6 @@
                 </a:solidFill>
                 <a:latin typeface="Leelawadee UI"/>
                 <a:cs typeface="Leelawadee UI"/>
-                <a:ea typeface="Leelawadee UI"/>
               </a:rPr>
               <a:t>Copper Dome Turret</a:t>
             </a:r>
@@ -4121,7 +3903,6 @@
                 </a:solidFill>
                 <a:latin typeface="Leelawadee UI"/>
                 <a:cs typeface="Leelawadee UI"/>
-                <a:ea typeface="Leelawadee UI"/>
               </a:rPr>
               <a:t>ป้อมยิงอัตโนมัติ — คลิกเลือกเป้า แล้วป้อมหันไปยิงเอง</a:t>
             </a:r>
@@ -4142,7 +3923,6 @@
                 </a:solidFill>
                 <a:latin typeface="Leelawadee UI"/>
                 <a:cs typeface="Leelawadee UI"/>
-                <a:ea typeface="Leelawadee UI"/>
               </a:rPr>
               <a:t>เขียนด้วย Python ทั้งหมด</a:t>
             </a:r>
@@ -4163,7 +3943,6 @@
                 </a:solidFill>
                 <a:latin typeface="Leelawadee UI"/>
                 <a:cs typeface="Leelawadee UI"/>
-                <a:ea typeface="Leelawadee UI"/>
               </a:rPr>
               <a:t>ARIS Project III  ·  Mini Project 1</a:t>
             </a:r>
@@ -4184,7 +3963,6 @@
                 </a:solidFill>
                 <a:latin typeface="Leelawadee UI"/>
                 <a:cs typeface="Leelawadee UI"/>
-                <a:ea typeface="Leelawadee UI"/>
               </a:rPr>
               <a:t>[ใส่ชื่อสมาชิกทีม]</a:t>
             </a:r>
@@ -4200,7 +3978,7 @@
 </file>
 
 <file path=ppt/slides/slide2.xml><?xml version="1.0" encoding="utf-8"?>
-<p:sld xmlns:a="http://schemas.openxmlformats.org/drawingml/2006/main" xmlns:p="http://schemas.openxmlformats.org/presentationml/2006/main" xmlns:r="http://schemas.openxmlformats.org/officeDocument/2006/relationships">
+<p:sld xmlns:a="http://schemas.openxmlformats.org/drawingml/2006/main" xmlns:r="http://schemas.openxmlformats.org/officeDocument/2006/relationships" xmlns:p="http://schemas.openxmlformats.org/presentationml/2006/main">
   <p:cSld>
     <p:bg>
       <p:bgPr>
@@ -4216,7 +3994,14 @@
         <p:cNvGrpSpPr/>
         <p:nvPr/>
       </p:nvGrpSpPr>
-      <p:grpSpPr/>
+      <p:grpSpPr>
+        <a:xfrm>
+          <a:off x="0" y="0"/>
+          <a:ext cx="0" cy="0"/>
+          <a:chOff x="0" y="0"/>
+          <a:chExt cx="0" cy="0"/>
+        </a:xfrm>
+      </p:grpSpPr>
       <p:sp>
         <p:nvSpPr>
           <p:cNvPr id="2" name="TextBox 1"/>
@@ -4234,7 +4019,7 @@
           <a:noFill/>
         </p:spPr>
         <p:txBody>
-          <a:bodyPr wrap="square" anchor="t" lIns="0" rIns="0" tIns="0" bIns="0">
+          <a:bodyPr wrap="square" lIns="0" tIns="0" rIns="0" bIns="0" anchor="t">
             <a:spAutoFit/>
           </a:bodyPr>
           <a:lstStyle/>
@@ -4254,7 +4039,6 @@
                 </a:solidFill>
                 <a:latin typeface="Leelawadee UI"/>
                 <a:cs typeface="Leelawadee UI"/>
-                <a:ea typeface="Leelawadee UI"/>
               </a:rPr>
               <a:t>ภาพรวมระบบ</a:t>
             </a:r>
@@ -4298,10 +4082,11 @@
           </a:fontRef>
         </p:style>
         <p:txBody>
-          <a:bodyPr rtlCol="0" anchor="ctr" wrap="square"/>
+          <a:bodyPr wrap="square" rtlCol="0" anchor="ctr"/>
           <a:lstStyle/>
           <a:p>
             <a:pPr algn="ctr"/>
+            <a:endParaRPr/>
           </a:p>
         </p:txBody>
       </p:sp>
@@ -4314,15 +4099,15 @@
           <p:nvPr/>
         </p:nvPicPr>
         <p:blipFill>
-          <a:blip r:embed="rId2"/>
+          <a:blip r:embed="rId3"/>
           <a:stretch>
             <a:fillRect/>
           </a:stretch>
         </p:blipFill>
         <p:spPr>
           <a:xfrm>
-            <a:off x="566928" y="1783080"/>
-            <a:ext cx="11057839" cy="3485934"/>
+            <a:off x="711709" y="1546861"/>
+            <a:ext cx="10245851" cy="3229958"/>
           </a:xfrm>
           <a:prstGeom prst="rect">
             <a:avLst/>
@@ -4368,7 +4153,7 @@
           </a:fontRef>
         </p:style>
         <p:txBody>
-          <a:bodyPr rtlCol="0" anchor="ctr" wrap="square" lIns="219456" rIns="219456"/>
+          <a:bodyPr wrap="square" lIns="219456" rIns="219456" rtlCol="0" anchor="ctr"/>
           <a:lstStyle/>
           <a:p>
             <a:pPr algn="l">
@@ -4386,7 +4171,6 @@
                 </a:solidFill>
                 <a:latin typeface="Leelawadee UI"/>
                 <a:cs typeface="Leelawadee UI"/>
-                <a:ea typeface="Leelawadee UI"/>
               </a:rPr>
               <a:t>ตรรกะทุกบรรทัดอยู่ฝั่ง Python — Arduino เป็นแค่ช่องสัญญาณเข้า/ออก</a:t>
             </a:r>
@@ -4402,7 +4186,7 @@
 </file>
 
 <file path=ppt/slides/slide3.xml><?xml version="1.0" encoding="utf-8"?>
-<p:sld xmlns:a="http://schemas.openxmlformats.org/drawingml/2006/main" xmlns:p="http://schemas.openxmlformats.org/presentationml/2006/main" xmlns:r="http://schemas.openxmlformats.org/officeDocument/2006/relationships">
+<p:sld xmlns:a="http://schemas.openxmlformats.org/drawingml/2006/main" xmlns:r="http://schemas.openxmlformats.org/officeDocument/2006/relationships" xmlns:p="http://schemas.openxmlformats.org/presentationml/2006/main">
   <p:cSld>
     <p:bg>
       <p:bgPr>
@@ -4418,7 +4202,14 @@
         <p:cNvGrpSpPr/>
         <p:nvPr/>
       </p:nvGrpSpPr>
-      <p:grpSpPr/>
+      <p:grpSpPr>
+        <a:xfrm>
+          <a:off x="0" y="0"/>
+          <a:ext cx="0" cy="0"/>
+          <a:chOff x="0" y="0"/>
+          <a:chExt cx="0" cy="0"/>
+        </a:xfrm>
+      </p:grpSpPr>
       <p:sp>
         <p:nvSpPr>
           <p:cNvPr id="2" name="TextBox 1"/>
@@ -4436,7 +4227,7 @@
           <a:noFill/>
         </p:spPr>
         <p:txBody>
-          <a:bodyPr wrap="square" anchor="t" lIns="0" rIns="0" tIns="0" bIns="0">
+          <a:bodyPr wrap="square" lIns="0" tIns="0" rIns="0" bIns="0" anchor="t">
             <a:spAutoFit/>
           </a:bodyPr>
           <a:lstStyle/>
@@ -4456,7 +4247,6 @@
                 </a:solidFill>
                 <a:latin typeface="Leelawadee UI"/>
                 <a:cs typeface="Leelawadee UI"/>
-                <a:ea typeface="Leelawadee UI"/>
               </a:rPr>
               <a:t>กลไกการสร้าง</a:t>
             </a:r>
@@ -4500,10 +4290,11 @@
           </a:fontRef>
         </p:style>
         <p:txBody>
-          <a:bodyPr rtlCol="0" anchor="ctr" wrap="square"/>
+          <a:bodyPr wrap="square" rtlCol="0" anchor="ctr"/>
           <a:lstStyle/>
           <a:p>
             <a:pPr algn="ctr"/>
+            <a:endParaRPr/>
           </a:p>
         </p:txBody>
       </p:sp>
@@ -4524,7 +4315,7 @@
           <a:noFill/>
         </p:spPr>
         <p:txBody>
-          <a:bodyPr wrap="square" anchor="t" lIns="0" rIns="0" tIns="0" bIns="0">
+          <a:bodyPr wrap="square" lIns="0" tIns="0" rIns="0" bIns="0" anchor="t">
             <a:spAutoFit/>
           </a:bodyPr>
           <a:lstStyle/>
@@ -4544,7 +4335,6 @@
                 </a:solidFill>
                 <a:latin typeface="Leelawadee UI"/>
                 <a:cs typeface="Leelawadee UI"/>
-                <a:ea typeface="Leelawadee UI"/>
               </a:rPr>
               <a:t>หัวข้อบังคับ ①</a:t>
             </a:r>
@@ -4592,10 +4382,11 @@
           </a:fontRef>
         </p:style>
         <p:txBody>
-          <a:bodyPr rtlCol="0" anchor="ctr" wrap="square"/>
+          <a:bodyPr wrap="square" rtlCol="0" anchor="ctr"/>
           <a:lstStyle/>
           <a:p>
             <a:pPr algn="ctr"/>
+            <a:endParaRPr/>
           </a:p>
         </p:txBody>
       </p:sp>
@@ -4616,7 +4407,7 @@
           <a:noFill/>
         </p:spPr>
         <p:txBody>
-          <a:bodyPr wrap="square" anchor="ctr" lIns="0" rIns="0" tIns="0" bIns="0">
+          <a:bodyPr wrap="square" lIns="0" tIns="0" rIns="0" bIns="0" anchor="ctr">
             <a:spAutoFit/>
           </a:bodyPr>
           <a:lstStyle/>
@@ -4636,7 +4427,6 @@
                 </a:solidFill>
                 <a:latin typeface="Leelawadee UI"/>
                 <a:cs typeface="Leelawadee UI"/>
-                <a:ea typeface="Leelawadee UI"/>
               </a:rPr>
               <a:t>🖼  รูปถ่ายป้อมจริง</a:t>
             </a:r>
@@ -4657,7 +4447,6 @@
                 </a:solidFill>
                 <a:latin typeface="Leelawadee UI"/>
                 <a:cs typeface="Leelawadee UI"/>
-                <a:ea typeface="Leelawadee UI"/>
               </a:rPr>
               <a:t>ให้เห็น flywheel คู่ + แกน pan/tilt</a:t>
             </a:r>
@@ -4681,12 +4470,12 @@
           <a:noFill/>
         </p:spPr>
         <p:txBody>
-          <a:bodyPr wrap="square" anchor="t" lIns="0" rIns="0" tIns="0" bIns="0">
+          <a:bodyPr wrap="square" lIns="0" tIns="0" rIns="0" bIns="0" anchor="t">
             <a:spAutoFit/>
           </a:bodyPr>
           <a:lstStyle/>
           <a:p>
-            <a:pPr algn="l" marL="274320" indent="-274320">
+            <a:pPr marL="274320" indent="-274320" algn="l">
               <a:lnSpc>
                 <a:spcPct val="125000"/>
               </a:lnSpc>
@@ -4701,13 +4490,12 @@
                 </a:solidFill>
                 <a:latin typeface="Leelawadee UI"/>
                 <a:cs typeface="Leelawadee UI"/>
-                <a:ea typeface="Leelawadee UI"/>
               </a:rPr>
               <a:t>▸  กลไกยิง — ล้อ flywheel คู่หมุนสวนทาง หนีบลูกบอลไม้แล้วสะบัดออก</a:t>
             </a:r>
           </a:p>
           <a:p>
-            <a:pPr algn="l" marL="274320" indent="-274320">
+            <a:pPr marL="274320" indent="-274320" algn="l">
               <a:lnSpc>
                 <a:spcPct val="125000"/>
               </a:lnSpc>
@@ -4722,13 +4510,12 @@
                 </a:solidFill>
                 <a:latin typeface="Leelawadee UI"/>
                 <a:cs typeface="Leelawadee UI"/>
-                <a:ea typeface="Leelawadee UI"/>
               </a:rPr>
               <a:t>▸  ป้อนลูก — แมกกาซีน gravity-feed ไม่มีเซอร์โวดันลูก</a:t>
             </a:r>
           </a:p>
           <a:p>
-            <a:pPr algn="l" marL="274320" indent="-274320">
+            <a:pPr marL="274320" indent="-274320" algn="l">
               <a:lnSpc>
                 <a:spcPct val="125000"/>
               </a:lnSpc>
@@ -4743,13 +4530,12 @@
                 </a:solidFill>
                 <a:latin typeface="Leelawadee UI"/>
                 <a:cs typeface="Leelawadee UI"/>
-                <a:ea typeface="Leelawadee UI"/>
               </a:rPr>
               <a:t>▸  สองแกน — pan ±50°  ·  tilt ผ่านเฟืองสะพาน (rack) ช่วง 90–180°</a:t>
             </a:r>
           </a:p>
           <a:p>
-            <a:pPr algn="l" marL="274320" indent="-274320">
+            <a:pPr marL="274320" indent="-274320" algn="l">
               <a:lnSpc>
                 <a:spcPct val="125000"/>
               </a:lnSpc>
@@ -4764,7 +4550,6 @@
                 </a:solidFill>
                 <a:latin typeface="Leelawadee UI"/>
                 <a:cs typeface="Leelawadee UI"/>
-                <a:ea typeface="Leelawadee UI"/>
               </a:rPr>
               <a:t>▸  เซอร์โว MG945 สองตัว</a:t>
             </a:r>
@@ -4810,7 +4595,7 @@
           </a:fontRef>
         </p:style>
         <p:txBody>
-          <a:bodyPr rtlCol="0" anchor="ctr" wrap="square" lIns="219456" rIns="219456"/>
+          <a:bodyPr wrap="square" lIns="219456" rIns="219456" rtlCol="0" anchor="ctr"/>
           <a:lstStyle/>
           <a:p>
             <a:pPr algn="l">
@@ -4828,7 +4613,6 @@
                 </a:solidFill>
                 <a:latin typeface="Leelawadee UI"/>
                 <a:cs typeface="Leelawadee UI"/>
-                <a:ea typeface="Leelawadee UI"/>
               </a:rPr>
               <a:t>⚙  ถอด gearbox ออกจากมอเตอร์ TT</a:t>
             </a:r>
@@ -4849,7 +4633,6 @@
                 </a:solidFill>
                 <a:latin typeface="Leelawadee UI"/>
                 <a:cs typeface="Leelawadee UI"/>
-                <a:ea typeface="Leelawadee UI"/>
               </a:rPr>
               <a:t>จากยิงไม่ออกเลย → ยิงได้เกิน 1.5 เมตร</a:t>
             </a:r>
@@ -4865,7 +4648,7 @@
 </file>
 
 <file path=ppt/slides/slide4.xml><?xml version="1.0" encoding="utf-8"?>
-<p:sld xmlns:a="http://schemas.openxmlformats.org/drawingml/2006/main" xmlns:p="http://schemas.openxmlformats.org/presentationml/2006/main" xmlns:r="http://schemas.openxmlformats.org/officeDocument/2006/relationships">
+<p:sld xmlns:a="http://schemas.openxmlformats.org/drawingml/2006/main" xmlns:r="http://schemas.openxmlformats.org/officeDocument/2006/relationships" xmlns:p="http://schemas.openxmlformats.org/presentationml/2006/main">
   <p:cSld>
     <p:bg>
       <p:bgPr>
@@ -4881,7 +4664,14 @@
         <p:cNvGrpSpPr/>
         <p:nvPr/>
       </p:nvGrpSpPr>
-      <p:grpSpPr/>
+      <p:grpSpPr>
+        <a:xfrm>
+          <a:off x="0" y="0"/>
+          <a:ext cx="0" cy="0"/>
+          <a:chOff x="0" y="0"/>
+          <a:chExt cx="0" cy="0"/>
+        </a:xfrm>
+      </p:grpSpPr>
       <p:sp>
         <p:nvSpPr>
           <p:cNvPr id="2" name="TextBox 1"/>
@@ -4899,7 +4689,7 @@
           <a:noFill/>
         </p:spPr>
         <p:txBody>
-          <a:bodyPr wrap="square" anchor="t" lIns="0" rIns="0" tIns="0" bIns="0">
+          <a:bodyPr wrap="square" lIns="0" tIns="0" rIns="0" bIns="0" anchor="t">
             <a:spAutoFit/>
           </a:bodyPr>
           <a:lstStyle/>
@@ -4919,7 +4709,6 @@
                 </a:solidFill>
                 <a:latin typeface="Leelawadee UI"/>
                 <a:cs typeface="Leelawadee UI"/>
-                <a:ea typeface="Leelawadee UI"/>
               </a:rPr>
               <a:t>แนวคิดออกแบบ: โหมดสโคป</a:t>
             </a:r>
@@ -4963,10 +4752,11 @@
           </a:fontRef>
         </p:style>
         <p:txBody>
-          <a:bodyPr rtlCol="0" anchor="ctr" wrap="square"/>
+          <a:bodyPr wrap="square" rtlCol="0" anchor="ctr"/>
           <a:lstStyle/>
           <a:p>
             <a:pPr algn="ctr"/>
+            <a:endParaRPr/>
           </a:p>
         </p:txBody>
       </p:sp>
@@ -4987,7 +4777,7 @@
           <a:noFill/>
         </p:spPr>
         <p:txBody>
-          <a:bodyPr wrap="square" anchor="t" lIns="0" rIns="0" tIns="0" bIns="0">
+          <a:bodyPr wrap="square" lIns="0" tIns="0" rIns="0" bIns="0" anchor="t">
             <a:spAutoFit/>
           </a:bodyPr>
           <a:lstStyle/>
@@ -5007,7 +4797,6 @@
                 </a:solidFill>
                 <a:latin typeface="Leelawadee UI"/>
                 <a:cs typeface="Leelawadee UI"/>
-                <a:ea typeface="Leelawadee UI"/>
               </a:rPr>
               <a:t>หัวข้อบังคับ ②</a:t>
             </a:r>
@@ -5053,10 +4842,11 @@
           </a:fontRef>
         </p:style>
         <p:txBody>
-          <a:bodyPr rtlCol="0" anchor="ctr" wrap="square"/>
+          <a:bodyPr wrap="square" rtlCol="0" anchor="ctr"/>
           <a:lstStyle/>
           <a:p>
             <a:pPr algn="ctr"/>
+            <a:endParaRPr/>
           </a:p>
         </p:txBody>
       </p:sp>
@@ -5097,10 +4887,11 @@
           </a:fontRef>
         </p:style>
         <p:txBody>
-          <a:bodyPr rtlCol="0" anchor="ctr" wrap="square"/>
+          <a:bodyPr wrap="square" rtlCol="0" anchor="ctr"/>
           <a:lstStyle/>
           <a:p>
             <a:pPr algn="ctr"/>
+            <a:endParaRPr/>
           </a:p>
         </p:txBody>
       </p:sp>
@@ -5141,10 +4932,11 @@
           </a:fontRef>
         </p:style>
         <p:txBody>
-          <a:bodyPr rtlCol="0" anchor="ctr" wrap="square"/>
+          <a:bodyPr wrap="square" rtlCol="0" anchor="ctr"/>
           <a:lstStyle/>
           <a:p>
             <a:pPr algn="ctr"/>
+            <a:endParaRPr/>
           </a:p>
         </p:txBody>
       </p:sp>
@@ -5185,10 +4977,11 @@
           </a:fontRef>
         </p:style>
         <p:txBody>
-          <a:bodyPr rtlCol="0" anchor="ctr" wrap="square"/>
+          <a:bodyPr wrap="square" rtlCol="0" anchor="ctr"/>
           <a:lstStyle/>
           <a:p>
             <a:pPr algn="ctr"/>
+            <a:endParaRPr/>
           </a:p>
         </p:txBody>
       </p:sp>
@@ -5229,10 +5022,11 @@
           </a:fontRef>
         </p:style>
         <p:txBody>
-          <a:bodyPr rtlCol="0" anchor="ctr" wrap="square"/>
+          <a:bodyPr wrap="square" rtlCol="0" anchor="ctr"/>
           <a:lstStyle/>
           <a:p>
             <a:pPr algn="ctr"/>
+            <a:endParaRPr/>
           </a:p>
         </p:txBody>
       </p:sp>
@@ -5273,10 +5067,11 @@
           </a:fontRef>
         </p:style>
         <p:txBody>
-          <a:bodyPr rtlCol="0" anchor="ctr" wrap="square"/>
+          <a:bodyPr wrap="square" rtlCol="0" anchor="ctr"/>
           <a:lstStyle/>
           <a:p>
             <a:pPr algn="ctr"/>
+            <a:endParaRPr/>
           </a:p>
         </p:txBody>
       </p:sp>
@@ -5297,7 +5092,7 @@
           <a:noFill/>
         </p:spPr>
         <p:txBody>
-          <a:bodyPr wrap="square" anchor="t" lIns="0" rIns="0" tIns="0" bIns="0">
+          <a:bodyPr wrap="square" lIns="0" tIns="0" rIns="0" bIns="0" anchor="t">
             <a:spAutoFit/>
           </a:bodyPr>
           <a:lstStyle/>
@@ -5317,7 +5112,6 @@
                 </a:solidFill>
                 <a:latin typeface="Leelawadee UI"/>
                 <a:cs typeface="Leelawadee UI"/>
-                <a:ea typeface="Leelawadee UI"/>
               </a:rPr>
               <a:t>error X</a:t>
             </a:r>
@@ -5341,7 +5135,7 @@
           <a:noFill/>
         </p:spPr>
         <p:txBody>
-          <a:bodyPr wrap="square" anchor="t" lIns="0" rIns="0" tIns="0" bIns="0">
+          <a:bodyPr wrap="square" lIns="0" tIns="0" rIns="0" bIns="0" anchor="t">
             <a:spAutoFit/>
           </a:bodyPr>
           <a:lstStyle/>
@@ -5361,7 +5155,6 @@
                 </a:solidFill>
                 <a:latin typeface="Leelawadee UI"/>
                 <a:cs typeface="Leelawadee UI"/>
-                <a:ea typeface="Leelawadee UI"/>
               </a:rPr>
               <a:t>error Y</a:t>
             </a:r>
@@ -5385,7 +5178,7 @@
           <a:noFill/>
         </p:spPr>
         <p:txBody>
-          <a:bodyPr wrap="square" anchor="t" lIns="0" rIns="0" tIns="0" bIns="0">
+          <a:bodyPr wrap="square" lIns="0" tIns="0" rIns="0" bIns="0" anchor="t">
             <a:spAutoFit/>
           </a:bodyPr>
           <a:lstStyle/>
@@ -5405,7 +5198,6 @@
                 </a:solidFill>
                 <a:latin typeface="Leelawadee UI"/>
                 <a:cs typeface="Leelawadee UI"/>
-                <a:ea typeface="Leelawadee UI"/>
               </a:rPr>
               <a:t>จุด zero (กากบาท) = ตำแหน่งที่ยิงแล้วโดน</a:t>
             </a:r>
@@ -5429,7 +5221,7 @@
           <a:noFill/>
         </p:spPr>
         <p:txBody>
-          <a:bodyPr wrap="square" anchor="t" lIns="0" rIns="0" tIns="0" bIns="0">
+          <a:bodyPr wrap="square" lIns="0" tIns="0" rIns="0" bIns="0" anchor="t">
             <a:spAutoFit/>
           </a:bodyPr>
           <a:lstStyle/>
@@ -5449,7 +5241,6 @@
                 </a:solidFill>
                 <a:latin typeface="Leelawadee UI"/>
                 <a:cs typeface="Leelawadee UI"/>
-                <a:ea typeface="Leelawadee UI"/>
               </a:rPr>
               <a:t>เล็ง = ลด error สองแกนให้เป็นศูนย์</a:t>
             </a:r>
@@ -5473,7 +5264,7 @@
           <a:noFill/>
         </p:spPr>
         <p:txBody>
-          <a:bodyPr wrap="square" anchor="t" lIns="0" rIns="0" tIns="0" bIns="0">
+          <a:bodyPr wrap="square" lIns="0" tIns="0" rIns="0" bIns="0" anchor="t">
             <a:spAutoFit/>
           </a:bodyPr>
           <a:lstStyle/>
@@ -5493,7 +5284,6 @@
                 </a:solidFill>
                 <a:latin typeface="Leelawadee UI"/>
                 <a:cs typeface="Leelawadee UI"/>
-                <a:ea typeface="Leelawadee UI"/>
               </a:rPr>
               <a:t>กล้องติดไปกับลำกล้อง → ไม่ต้องวัดระยะถึงเป้าเลย</a:t>
             </a:r>
@@ -5517,12 +5307,12 @@
           <a:noFill/>
         </p:spPr>
         <p:txBody>
-          <a:bodyPr wrap="square" anchor="t" lIns="0" rIns="0" tIns="0" bIns="0">
+          <a:bodyPr wrap="square" lIns="0" tIns="0" rIns="0" bIns="0" anchor="t">
             <a:spAutoFit/>
           </a:bodyPr>
           <a:lstStyle/>
           <a:p>
-            <a:pPr algn="l" marL="274320" indent="-274320">
+            <a:pPr marL="274320" indent="-274320" algn="l">
               <a:lnSpc>
                 <a:spcPct val="125000"/>
               </a:lnSpc>
@@ -5537,13 +5327,12 @@
                 </a:solidFill>
                 <a:latin typeface="Leelawadee UI"/>
                 <a:cs typeface="Leelawadee UI"/>
-                <a:ea typeface="Leelawadee UI"/>
               </a:rPr>
               <a:t>▸  P controller  ·  เกน 0.03 องศาต่อพิกเซล</a:t>
             </a:r>
           </a:p>
           <a:p>
-            <a:pPr algn="l" marL="274320" indent="-274320">
+            <a:pPr marL="274320" indent="-274320" algn="l">
               <a:lnSpc>
                 <a:spcPct val="125000"/>
               </a:lnSpc>
@@ -5558,13 +5347,12 @@
                 </a:solidFill>
                 <a:latin typeface="Leelawadee UI"/>
                 <a:cs typeface="Leelawadee UI"/>
-                <a:ea typeface="Leelawadee UI"/>
               </a:rPr>
               <a:t>▸  จำกัดก้าวละไม่เกิน 6 องศา กันเหวี่ยงเกิน</a:t>
             </a:r>
           </a:p>
           <a:p>
-            <a:pPr algn="l" marL="274320" indent="-274320">
+            <a:pPr marL="274320" indent="-274320" algn="l">
               <a:lnSpc>
                 <a:spcPct val="125000"/>
               </a:lnSpc>
@@ -5579,13 +5367,12 @@
                 </a:solidFill>
                 <a:latin typeface="Leelawadee UI"/>
                 <a:cs typeface="Leelawadee UI"/>
-                <a:ea typeface="Leelawadee UI"/>
               </a:rPr>
               <a:t>▸  ต้องอยู่ในกรอบ 15 พิกเซล ติดกัน 3 เฟรม ถึงประกาศว่าพร้อมยิง</a:t>
             </a:r>
           </a:p>
           <a:p>
-            <a:pPr algn="l" marL="274320" indent="-274320">
+            <a:pPr marL="274320" indent="-274320" algn="l">
               <a:lnSpc>
                 <a:spcPct val="125000"/>
               </a:lnSpc>
@@ -5600,7 +5387,6 @@
                 </a:solidFill>
                 <a:latin typeface="Leelawadee UI"/>
                 <a:cs typeface="Leelawadee UI"/>
-                <a:ea typeface="Leelawadee UI"/>
               </a:rPr>
               <a:t>▸  เป้าอยู่ระดับโต๊ะเดียวกัน + ยิงแรงคงที่ → จุด zero จุดเดียวคุมได้ทั้งช่วง 1.5–2.4 ม.</a:t>
             </a:r>
@@ -5616,7 +5402,7 @@
 </file>
 
 <file path=ppt/slides/slide5.xml><?xml version="1.0" encoding="utf-8"?>
-<p:sld xmlns:a="http://schemas.openxmlformats.org/drawingml/2006/main" xmlns:p="http://schemas.openxmlformats.org/presentationml/2006/main" xmlns:r="http://schemas.openxmlformats.org/officeDocument/2006/relationships">
+<p:sld xmlns:a="http://schemas.openxmlformats.org/drawingml/2006/main" xmlns:r="http://schemas.openxmlformats.org/officeDocument/2006/relationships" xmlns:p="http://schemas.openxmlformats.org/presentationml/2006/main">
   <p:cSld>
     <p:bg>
       <p:bgPr>
@@ -5632,7 +5418,14 @@
         <p:cNvGrpSpPr/>
         <p:nvPr/>
       </p:nvGrpSpPr>
-      <p:grpSpPr/>
+      <p:grpSpPr>
+        <a:xfrm>
+          <a:off x="0" y="0"/>
+          <a:ext cx="0" cy="0"/>
+          <a:chOff x="0" y="0"/>
+          <a:chExt cx="0" cy="0"/>
+        </a:xfrm>
+      </p:grpSpPr>
       <p:sp>
         <p:nvSpPr>
           <p:cNvPr id="2" name="TextBox 1"/>
@@ -5650,7 +5443,7 @@
           <a:noFill/>
         </p:spPr>
         <p:txBody>
-          <a:bodyPr wrap="square" anchor="t" lIns="0" rIns="0" tIns="0" bIns="0">
+          <a:bodyPr wrap="square" lIns="0" tIns="0" rIns="0" bIns="0" anchor="t">
             <a:spAutoFit/>
           </a:bodyPr>
           <a:lstStyle/>
@@ -5670,7 +5463,6 @@
                 </a:solidFill>
                 <a:latin typeface="Leelawadee UI"/>
                 <a:cs typeface="Leelawadee UI"/>
-                <a:ea typeface="Leelawadee UI"/>
               </a:rPr>
               <a:t>วงจร และทฤษฎีที่ประยุกต์ใช้</a:t>
             </a:r>
@@ -5714,10 +5506,11 @@
           </a:fontRef>
         </p:style>
         <p:txBody>
-          <a:bodyPr rtlCol="0" anchor="ctr" wrap="square"/>
+          <a:bodyPr wrap="square" rtlCol="0" anchor="ctr"/>
           <a:lstStyle/>
           <a:p>
             <a:pPr algn="ctr"/>
+            <a:endParaRPr/>
           </a:p>
         </p:txBody>
       </p:sp>
@@ -5738,7 +5531,7 @@
           <a:noFill/>
         </p:spPr>
         <p:txBody>
-          <a:bodyPr wrap="square" anchor="t" lIns="0" rIns="0" tIns="0" bIns="0">
+          <a:bodyPr wrap="square" lIns="0" tIns="0" rIns="0" bIns="0" anchor="t">
             <a:spAutoFit/>
           </a:bodyPr>
           <a:lstStyle/>
@@ -5758,7 +5551,6 @@
                 </a:solidFill>
                 <a:latin typeface="Leelawadee UI"/>
                 <a:cs typeface="Leelawadee UI"/>
-                <a:ea typeface="Leelawadee UI"/>
               </a:rPr>
               <a:t>หัวข้อบังคับ ③</a:t>
             </a:r>
@@ -5774,7 +5566,7 @@
           <p:nvPr/>
         </p:nvPicPr>
         <p:blipFill>
-          <a:blip r:embed="rId2"/>
+          <a:blip r:embed="rId3"/>
           <a:stretch>
             <a:fillRect/>
           </a:stretch>
@@ -5806,12 +5598,12 @@
           <a:noFill/>
         </p:spPr>
         <p:txBody>
-          <a:bodyPr wrap="square" anchor="t" lIns="0" rIns="0" tIns="0" bIns="0">
+          <a:bodyPr wrap="square" lIns="0" tIns="0" rIns="0" bIns="0" anchor="t">
             <a:spAutoFit/>
           </a:bodyPr>
           <a:lstStyle/>
           <a:p>
-            <a:pPr algn="l" marL="274320" indent="-274320">
+            <a:pPr marL="274320" indent="-274320" algn="l">
               <a:lnSpc>
                 <a:spcPct val="125000"/>
               </a:lnSpc>
@@ -5826,13 +5618,12 @@
                 </a:solidFill>
                 <a:latin typeface="Leelawadee UI"/>
                 <a:cs typeface="Leelawadee UI"/>
-                <a:ea typeface="Leelawadee UI"/>
               </a:rPr>
               <a:t>▸  18650 ×2 อนุกรม = 7.4 V แยกสองทาง</a:t>
             </a:r>
           </a:p>
           <a:p>
-            <a:pPr algn="l" marL="274320" indent="-274320">
+            <a:pPr marL="274320" indent="-274320" algn="l">
               <a:lnSpc>
                 <a:spcPct val="125000"/>
               </a:lnSpc>
@@ -5847,13 +5638,12 @@
                 </a:solidFill>
                 <a:latin typeface="Leelawadee UI"/>
                 <a:cs typeface="Leelawadee UI"/>
-                <a:ea typeface="Leelawadee UI"/>
               </a:rPr>
               <a:t>▸  → L298N (H-bridge)  ·  PWM ที่ ENA/ENB คุมความเร็ว  ·  IN1–IN4 คุมทิศ</a:t>
             </a:r>
           </a:p>
           <a:p>
-            <a:pPr algn="l" marL="274320" indent="-274320">
+            <a:pPr marL="274320" indent="-274320" algn="l">
               <a:lnSpc>
                 <a:spcPct val="125000"/>
               </a:lnSpc>
@@ -5868,13 +5658,12 @@
                 </a:solidFill>
                 <a:latin typeface="Leelawadee UI"/>
                 <a:cs typeface="Leelawadee UI"/>
-                <a:ea typeface="Leelawadee UI"/>
               </a:rPr>
               <a:t>▸  → buck 6 V เลี้ยงเซอร์โวแยก (ถ้าดึงจาก USB บอร์ดจะรีเซ็ตตัวเอง)</a:t>
             </a:r>
           </a:p>
           <a:p>
-            <a:pPr algn="l" marL="274320" indent="-274320">
+            <a:pPr marL="274320" indent="-274320" algn="l">
               <a:lnSpc>
                 <a:spcPct val="125000"/>
               </a:lnSpc>
@@ -5889,7 +5678,6 @@
                 </a:solidFill>
                 <a:latin typeface="Leelawadee UI"/>
                 <a:cs typeface="Leelawadee UI"/>
-                <a:ea typeface="Leelawadee UI"/>
               </a:rPr>
               <a:t>▸  กราวด์ทุกส่วนต่อร่วมกัน</a:t>
             </a:r>
@@ -5935,7 +5723,7 @@
           </a:fontRef>
         </p:style>
         <p:txBody>
-          <a:bodyPr rtlCol="0" anchor="ctr" wrap="square" lIns="219456" rIns="219456"/>
+          <a:bodyPr wrap="square" lIns="219456" rIns="219456" rtlCol="0" anchor="ctr"/>
           <a:lstStyle/>
           <a:p>
             <a:pPr algn="l">
@@ -5953,7 +5741,6 @@
                 </a:solidFill>
                 <a:latin typeface="Leelawadee UI"/>
                 <a:cs typeface="Leelawadee UI"/>
-                <a:ea typeface="Leelawadee UI"/>
               </a:rPr>
               <a:t>แบบจำลองกล้องรูเข็ม</a:t>
             </a:r>
@@ -5974,7 +5761,6 @@
                 </a:solidFill>
                 <a:latin typeface="Leelawadee UI"/>
                 <a:cs typeface="Leelawadee UI"/>
-                <a:ea typeface="Leelawadee UI"/>
               </a:rPr>
               <a:t>θ  =  arctan( Δpx / f )     ·     f = 1400 px</a:t>
             </a:r>
@@ -5995,7 +5781,6 @@
                 </a:solidFill>
                 <a:latin typeface="Leelawadee UI"/>
                 <a:cs typeface="Leelawadee UI"/>
-                <a:ea typeface="Leelawadee UI"/>
               </a:rPr>
               <a:t>แปลง “เป้าเยื้องกี่พิกเซล” → “ต้องหมุนกี่องศา”</a:t>
             </a:r>
@@ -6011,7 +5796,7 @@
 </file>
 
 <file path=ppt/slides/slide6.xml><?xml version="1.0" encoding="utf-8"?>
-<p:sld xmlns:a="http://schemas.openxmlformats.org/drawingml/2006/main" xmlns:p="http://schemas.openxmlformats.org/presentationml/2006/main" xmlns:r="http://schemas.openxmlformats.org/officeDocument/2006/relationships">
+<p:sld xmlns:a="http://schemas.openxmlformats.org/drawingml/2006/main" xmlns:r="http://schemas.openxmlformats.org/officeDocument/2006/relationships" xmlns:p="http://schemas.openxmlformats.org/presentationml/2006/main">
   <p:cSld>
     <p:bg>
       <p:bgPr>
@@ -6027,7 +5812,14 @@
         <p:cNvGrpSpPr/>
         <p:nvPr/>
       </p:nvGrpSpPr>
-      <p:grpSpPr/>
+      <p:grpSpPr>
+        <a:xfrm>
+          <a:off x="0" y="0"/>
+          <a:ext cx="0" cy="0"/>
+          <a:chOff x="0" y="0"/>
+          <a:chExt cx="0" cy="0"/>
+        </a:xfrm>
+      </p:grpSpPr>
       <p:sp>
         <p:nvSpPr>
           <p:cNvPr id="2" name="TextBox 1"/>
@@ -6045,7 +5837,7 @@
           <a:noFill/>
         </p:spPr>
         <p:txBody>
-          <a:bodyPr wrap="square" anchor="t" lIns="0" rIns="0" tIns="0" bIns="0">
+          <a:bodyPr wrap="square" lIns="0" tIns="0" rIns="0" bIns="0" anchor="t">
             <a:spAutoFit/>
           </a:bodyPr>
           <a:lstStyle/>
@@ -6065,7 +5857,6 @@
                 </a:solidFill>
                 <a:latin typeface="Leelawadee UI"/>
                 <a:cs typeface="Leelawadee UI"/>
-                <a:ea typeface="Leelawadee UI"/>
               </a:rPr>
               <a:t>รายการคำนวณการเคลื่อนที่กระสุน</a:t>
             </a:r>
@@ -6109,10 +5900,11 @@
           </a:fontRef>
         </p:style>
         <p:txBody>
-          <a:bodyPr rtlCol="0" anchor="ctr" wrap="square"/>
+          <a:bodyPr wrap="square" rtlCol="0" anchor="ctr"/>
           <a:lstStyle/>
           <a:p>
             <a:pPr algn="ctr"/>
+            <a:endParaRPr/>
           </a:p>
         </p:txBody>
       </p:sp>
@@ -6133,7 +5925,7 @@
           <a:noFill/>
         </p:spPr>
         <p:txBody>
-          <a:bodyPr wrap="square" anchor="t" lIns="0" rIns="0" tIns="0" bIns="0">
+          <a:bodyPr wrap="square" lIns="0" tIns="0" rIns="0" bIns="0" anchor="t">
             <a:spAutoFit/>
           </a:bodyPr>
           <a:lstStyle/>
@@ -6153,7 +5945,6 @@
                 </a:solidFill>
                 <a:latin typeface="Leelawadee UI"/>
                 <a:cs typeface="Leelawadee UI"/>
-                <a:ea typeface="Leelawadee UI"/>
               </a:rPr>
               <a:t>หัวข้อบังคับ ④</a:t>
             </a:r>
@@ -6201,7 +5992,7 @@
           </a:fontRef>
         </p:style>
         <p:txBody>
-          <a:bodyPr rtlCol="0" anchor="ctr" wrap="square" lIns="256032"/>
+          <a:bodyPr wrap="square" lIns="256032" rtlCol="0" anchor="ctr"/>
           <a:lstStyle/>
           <a:p>
             <a:pPr algn="l">
@@ -6219,7 +6010,6 @@
                 </a:solidFill>
                 <a:latin typeface="Leelawadee UI"/>
                 <a:cs typeface="Leelawadee UI"/>
-                <a:ea typeface="Leelawadee UI"/>
               </a:rPr>
               <a:t>x(t) = v·cosθ·t          y(t) = h₀ + v·sinθ·t − ½gt²</a:t>
             </a:r>
@@ -6240,7 +6030,6 @@
                 </a:solidFill>
                 <a:latin typeface="Leelawadee UI"/>
                 <a:cs typeface="Leelawadee UI"/>
-                <a:ea typeface="Leelawadee UI"/>
               </a:rPr>
               <a:t>เป้าสูงกว่าปากกระบอก  Δh = +0.40 m   (โต๊ะ 800 − แท่นปืน 400 mm ตามโจทย์)</a:t>
             </a:r>
@@ -6266,12 +6055,48 @@
                 <a:tableStyleId>{5C22544A-7EE6-4342-B048-85BDC9FD1C3A}</a:tableStyleId>
               </a:tblPr>
               <a:tblGrid>
-                <a:gridCol w="2071116"/>
-                <a:gridCol w="862965"/>
-                <a:gridCol w="862965"/>
-                <a:gridCol w="862965"/>
-                <a:gridCol w="862965"/>
-                <a:gridCol w="1380744"/>
+                <a:gridCol w="2071116">
+                  <a:extLst>
+                    <a:ext uri="{9D8B030D-6E8A-4147-A177-3AD203B41FA5}">
+                      <a16:colId xmlns:a16="http://schemas.microsoft.com/office/drawing/2014/main" val="20000"/>
+                    </a:ext>
+                  </a:extLst>
+                </a:gridCol>
+                <a:gridCol w="862965">
+                  <a:extLst>
+                    <a:ext uri="{9D8B030D-6E8A-4147-A177-3AD203B41FA5}">
+                      <a16:colId xmlns:a16="http://schemas.microsoft.com/office/drawing/2014/main" val="20001"/>
+                    </a:ext>
+                  </a:extLst>
+                </a:gridCol>
+                <a:gridCol w="862965">
+                  <a:extLst>
+                    <a:ext uri="{9D8B030D-6E8A-4147-A177-3AD203B41FA5}">
+                      <a16:colId xmlns:a16="http://schemas.microsoft.com/office/drawing/2014/main" val="20002"/>
+                    </a:ext>
+                  </a:extLst>
+                </a:gridCol>
+                <a:gridCol w="862965">
+                  <a:extLst>
+                    <a:ext uri="{9D8B030D-6E8A-4147-A177-3AD203B41FA5}">
+                      <a16:colId xmlns:a16="http://schemas.microsoft.com/office/drawing/2014/main" val="20003"/>
+                    </a:ext>
+                  </a:extLst>
+                </a:gridCol>
+                <a:gridCol w="862965">
+                  <a:extLst>
+                    <a:ext uri="{9D8B030D-6E8A-4147-A177-3AD203B41FA5}">
+                      <a16:colId xmlns:a16="http://schemas.microsoft.com/office/drawing/2014/main" val="20004"/>
+                    </a:ext>
+                  </a:extLst>
+                </a:gridCol>
+                <a:gridCol w="1380744">
+                  <a:extLst>
+                    <a:ext uri="{9D8B030D-6E8A-4147-A177-3AD203B41FA5}">
+                      <a16:colId xmlns:a16="http://schemas.microsoft.com/office/drawing/2014/main" val="20005"/>
+                    </a:ext>
+                  </a:extLst>
+                </a:gridCol>
               </a:tblGrid>
               <a:tr h="420624">
                 <a:tc>
@@ -6294,7 +6119,6 @@
                           </a:solidFill>
                           <a:latin typeface="Leelawadee UI"/>
                           <a:cs typeface="Leelawadee UI"/>
-                          <a:ea typeface="Leelawadee UI"/>
                         </a:rPr>
                         <a:t>ความเร็วต้นที่ต้องใช้ (m/s)</a:t>
                       </a:r>
@@ -6326,7 +6150,6 @@
                           </a:solidFill>
                           <a:latin typeface="Leelawadee UI"/>
                           <a:cs typeface="Leelawadee UI"/>
-                          <a:ea typeface="Leelawadee UI"/>
                         </a:rPr>
                         <a:t>1.50 m</a:t>
                       </a:r>
@@ -6358,7 +6181,6 @@
                           </a:solidFill>
                           <a:latin typeface="Leelawadee UI"/>
                           <a:cs typeface="Leelawadee UI"/>
-                          <a:ea typeface="Leelawadee UI"/>
                         </a:rPr>
                         <a:t>1.75 m</a:t>
                       </a:r>
@@ -6390,7 +6212,6 @@
                           </a:solidFill>
                           <a:latin typeface="Leelawadee UI"/>
                           <a:cs typeface="Leelawadee UI"/>
-                          <a:ea typeface="Leelawadee UI"/>
                         </a:rPr>
                         <a:t>2.00 m</a:t>
                       </a:r>
@@ -6422,7 +6243,6 @@
                           </a:solidFill>
                           <a:latin typeface="Leelawadee UI"/>
                           <a:cs typeface="Leelawadee UI"/>
-                          <a:ea typeface="Leelawadee UI"/>
                         </a:rPr>
                         <a:t>2.25 m</a:t>
                       </a:r>
@@ -6447,17 +6267,7 @@
                           <a:spcPts val="0"/>
                         </a:spcAft>
                       </a:pPr>
-                      <a:r>
-                        <a:rPr sz="1300" b="1" i="0">
-                          <a:solidFill>
-                            <a:srgbClr val="FFFFFF"/>
-                          </a:solidFill>
-                          <a:latin typeface="Leelawadee UI"/>
-                          <a:cs typeface="Leelawadee UI"/>
-                          <a:ea typeface="Leelawadee UI"/>
-                        </a:rPr>
-                        <a:t/>
-                      </a:r>
+                      <a:endParaRPr/>
                     </a:p>
                   </a:txBody>
                   <a:tcPr marL="73152" marR="73152" anchor="ctr">
@@ -6466,6 +6276,11 @@
                     </a:solidFill>
                   </a:tcPr>
                 </a:tc>
+                <a:extLst>
+                  <a:ext uri="{0D108BD9-81ED-4DB2-BD59-A6C34878D82A}">
+                    <a16:rowId xmlns:a16="http://schemas.microsoft.com/office/drawing/2014/main" val="10000"/>
+                  </a:ext>
+                </a:extLst>
               </a:tr>
               <a:tr h="420624">
                 <a:tc>
@@ -6488,7 +6303,6 @@
                           </a:solidFill>
                           <a:latin typeface="Leelawadee UI"/>
                           <a:cs typeface="Leelawadee UI"/>
-                          <a:ea typeface="Leelawadee UI"/>
                         </a:rPr>
                         <a:t>θ = 25°</a:t>
                       </a:r>
@@ -6520,7 +6334,6 @@
                           </a:solidFill>
                           <a:latin typeface="Leelawadee UI"/>
                           <a:cs typeface="Leelawadee UI"/>
-                          <a:ea typeface="Leelawadee UI"/>
                         </a:rPr>
                         <a:t>6.70</a:t>
                       </a:r>
@@ -6552,7 +6365,6 @@
                           </a:solidFill>
                           <a:latin typeface="Leelawadee UI"/>
                           <a:cs typeface="Leelawadee UI"/>
-                          <a:ea typeface="Leelawadee UI"/>
                         </a:rPr>
                         <a:t>6.63</a:t>
                       </a:r>
@@ -6584,7 +6396,6 @@
                           </a:solidFill>
                           <a:latin typeface="Leelawadee UI"/>
                           <a:cs typeface="Leelawadee UI"/>
-                          <a:ea typeface="Leelawadee UI"/>
                         </a:rPr>
                         <a:t>6.70</a:t>
                       </a:r>
@@ -6616,7 +6427,6 @@
                           </a:solidFill>
                           <a:latin typeface="Leelawadee UI"/>
                           <a:cs typeface="Leelawadee UI"/>
-                          <a:ea typeface="Leelawadee UI"/>
                         </a:rPr>
                         <a:t>6.82</a:t>
                       </a:r>
@@ -6648,7 +6458,6 @@
                           </a:solidFill>
                           <a:latin typeface="Leelawadee UI"/>
                           <a:cs typeface="Leelawadee UI"/>
-                          <a:ea typeface="Leelawadee UI"/>
                         </a:rPr>
                         <a:t>⚠  ดิ่งแล้วขึ้น</a:t>
                       </a:r>
@@ -6660,6 +6469,11 @@
                     </a:solidFill>
                   </a:tcPr>
                 </a:tc>
+                <a:extLst>
+                  <a:ext uri="{0D108BD9-81ED-4DB2-BD59-A6C34878D82A}">
+                    <a16:rowId xmlns:a16="http://schemas.microsoft.com/office/drawing/2014/main" val="10001"/>
+                  </a:ext>
+                </a:extLst>
               </a:tr>
               <a:tr h="420624">
                 <a:tc>
@@ -6682,7 +6496,6 @@
                           </a:solidFill>
                           <a:latin typeface="Leelawadee UI"/>
                           <a:cs typeface="Leelawadee UI"/>
-                          <a:ea typeface="Leelawadee UI"/>
                         </a:rPr>
                         <a:t>θ = 30°</a:t>
                       </a:r>
@@ -6714,7 +6527,6 @@
                           </a:solidFill>
                           <a:latin typeface="Leelawadee UI"/>
                           <a:cs typeface="Leelawadee UI"/>
-                          <a:ea typeface="Leelawadee UI"/>
                         </a:rPr>
                         <a:t>5.62</a:t>
                       </a:r>
@@ -6746,7 +6558,6 @@
                           </a:solidFill>
                           <a:latin typeface="Leelawadee UI"/>
                           <a:cs typeface="Leelawadee UI"/>
-                          <a:ea typeface="Leelawadee UI"/>
                         </a:rPr>
                         <a:t>5.73</a:t>
                       </a:r>
@@ -6778,7 +6589,6 @@
                           </a:solidFill>
                           <a:latin typeface="Leelawadee UI"/>
                           <a:cs typeface="Leelawadee UI"/>
-                          <a:ea typeface="Leelawadee UI"/>
                         </a:rPr>
                         <a:t>5.89</a:t>
                       </a:r>
@@ -6810,7 +6620,6 @@
                           </a:solidFill>
                           <a:latin typeface="Leelawadee UI"/>
                           <a:cs typeface="Leelawadee UI"/>
-                          <a:ea typeface="Leelawadee UI"/>
                         </a:rPr>
                         <a:t>6.07</a:t>
                       </a:r>
@@ -6842,7 +6651,6 @@
                           </a:solidFill>
                           <a:latin typeface="Leelawadee UI"/>
                           <a:cs typeface="Leelawadee UI"/>
-                          <a:ea typeface="Leelawadee UI"/>
                         </a:rPr>
                         <a:t>✓  เรียงขึ้น</a:t>
                       </a:r>
@@ -6854,6 +6662,11 @@
                     </a:solidFill>
                   </a:tcPr>
                 </a:tc>
+                <a:extLst>
+                  <a:ext uri="{0D108BD9-81ED-4DB2-BD59-A6C34878D82A}">
+                    <a16:rowId xmlns:a16="http://schemas.microsoft.com/office/drawing/2014/main" val="10002"/>
+                  </a:ext>
+                </a:extLst>
               </a:tr>
               <a:tr h="420624">
                 <a:tc>
@@ -6876,7 +6689,6 @@
                           </a:solidFill>
                           <a:latin typeface="Leelawadee UI"/>
                           <a:cs typeface="Leelawadee UI"/>
-                          <a:ea typeface="Leelawadee UI"/>
                         </a:rPr>
                         <a:t>θ = 35°</a:t>
                       </a:r>
@@ -6908,7 +6720,6 @@
                           </a:solidFill>
                           <a:latin typeface="Leelawadee UI"/>
                           <a:cs typeface="Leelawadee UI"/>
-                          <a:ea typeface="Leelawadee UI"/>
                         </a:rPr>
                         <a:t>5.03</a:t>
                       </a:r>
@@ -6940,7 +6751,6 @@
                           </a:solidFill>
                           <a:latin typeface="Leelawadee UI"/>
                           <a:cs typeface="Leelawadee UI"/>
-                          <a:ea typeface="Leelawadee UI"/>
                         </a:rPr>
                         <a:t>5.21</a:t>
                       </a:r>
@@ -6972,7 +6782,6 @@
                           </a:solidFill>
                           <a:latin typeface="Leelawadee UI"/>
                           <a:cs typeface="Leelawadee UI"/>
-                          <a:ea typeface="Leelawadee UI"/>
                         </a:rPr>
                         <a:t>5.41</a:t>
                       </a:r>
@@ -7004,7 +6813,6 @@
                           </a:solidFill>
                           <a:latin typeface="Leelawadee UI"/>
                           <a:cs typeface="Leelawadee UI"/>
-                          <a:ea typeface="Leelawadee UI"/>
                         </a:rPr>
                         <a:t>5.61</a:t>
                       </a:r>
@@ -7036,7 +6844,6 @@
                           </a:solidFill>
                           <a:latin typeface="Leelawadee UI"/>
                           <a:cs typeface="Leelawadee UI"/>
-                          <a:ea typeface="Leelawadee UI"/>
                         </a:rPr>
                         <a:t>✓  เรียงขึ้น</a:t>
                       </a:r>
@@ -7048,6 +6855,11 @@
                     </a:solidFill>
                   </a:tcPr>
                 </a:tc>
+                <a:extLst>
+                  <a:ext uri="{0D108BD9-81ED-4DB2-BD59-A6C34878D82A}">
+                    <a16:rowId xmlns:a16="http://schemas.microsoft.com/office/drawing/2014/main" val="10003"/>
+                  </a:ext>
+                </a:extLst>
               </a:tr>
             </a:tbl>
           </a:graphicData>
@@ -7070,12 +6882,12 @@
           <a:noFill/>
         </p:spPr>
         <p:txBody>
-          <a:bodyPr wrap="square" anchor="t" lIns="0" rIns="0" tIns="0" bIns="0">
+          <a:bodyPr wrap="square" lIns="0" tIns="0" rIns="0" bIns="0" anchor="t">
             <a:spAutoFit/>
           </a:bodyPr>
           <a:lstStyle/>
           <a:p>
-            <a:pPr algn="l" marL="237744" indent="-237744">
+            <a:pPr marL="237744" indent="-237744" algn="l">
               <a:lnSpc>
                 <a:spcPct val="125000"/>
               </a:lnSpc>
@@ -7090,13 +6902,12 @@
                 </a:solidFill>
                 <a:latin typeface="Leelawadee UI"/>
                 <a:cs typeface="Leelawadee UI"/>
-                <a:ea typeface="Leelawadee UI"/>
               </a:rPr>
               <a:t>1.  ระยะโจทย์ 1.5–2.4 m → ต้องการความเร็วลูกแค่ ~5–6 m/s</a:t>
             </a:r>
           </a:p>
           <a:p>
-            <a:pPr algn="l" marL="237744" indent="-237744">
+            <a:pPr marL="237744" indent="-237744" algn="l">
               <a:lnSpc>
                 <a:spcPct val="125000"/>
               </a:lnSpc>
@@ -7111,13 +6922,12 @@
                 </a:solidFill>
                 <a:latin typeface="Leelawadee UI"/>
                 <a:cs typeface="Leelawadee UI"/>
-                <a:ea typeface="Leelawadee UI"/>
               </a:rPr>
               <a:t>2.  ที่ 25° ระยะเดียวได้จากความเร็ว 2 ค่า = กำกวมกลางช่วงใช้งาน → ล็อกมุมเงย 30–35°</a:t>
             </a:r>
           </a:p>
           <a:p>
-            <a:pPr algn="l" marL="237744" indent="-237744">
+            <a:pPr marL="237744" indent="-237744" algn="l">
               <a:lnSpc>
                 <a:spcPct val="125000"/>
               </a:lnSpc>
@@ -7132,13 +6942,12 @@
                 </a:solidFill>
                 <a:latin typeface="Leelawadee UI"/>
                 <a:cs typeface="Leelawadee UI"/>
-                <a:ea typeface="Leelawadee UI"/>
               </a:rPr>
               <a:t>3.  ความเร็วขอบล้อ ≈ 2× ความเร็วลูก · ล้อ Ø50 mm → ต้องหมุน ~3800 RPM</a:t>
             </a:r>
           </a:p>
           <a:p>
-            <a:pPr algn="l" marL="237744" indent="-237744">
+            <a:pPr marL="237744" indent="-237744" algn="l">
               <a:lnSpc>
                 <a:spcPct val="125000"/>
               </a:lnSpc>
@@ -7153,7 +6962,6 @@
                 </a:solidFill>
                 <a:latin typeface="Leelawadee UI"/>
                 <a:cs typeface="Leelawadee UI"/>
-                <a:ea typeface="Leelawadee UI"/>
               </a:rPr>
               <a:t>⟵  ตัวเลขนี้เองที่บอกว่ามอเตอร์มีเกียร์ (~200 RPM) ใช้ไม่ได้ ต้องถอด gearbox</a:t>
             </a:r>
@@ -7177,7 +6985,7 @@
           <a:noFill/>
         </p:spPr>
         <p:txBody>
-          <a:bodyPr wrap="square" anchor="t" lIns="0" rIns="0" tIns="0" bIns="0">
+          <a:bodyPr wrap="square" lIns="0" tIns="0" rIns="0" bIns="0" anchor="t">
             <a:spAutoFit/>
           </a:bodyPr>
           <a:lstStyle/>
@@ -7197,7 +7005,6 @@
                 </a:solidFill>
                 <a:latin typeface="Leelawadee UI"/>
                 <a:cs typeface="Leelawadee UI"/>
-                <a:ea typeface="Leelawadee UI"/>
               </a:rPr>
               <a:t>แบบจำลองไม่รวมแรงต้านอากาศ — ใช้กำหนดข้อกำหนดการออกแบบ ความแม่นจริงมาจากการยิงวัด</a:t>
             </a:r>
@@ -7213,7 +7020,7 @@
 </file>
 
 <file path=ppt/slides/slide7.xml><?xml version="1.0" encoding="utf-8"?>
-<p:sld xmlns:a="http://schemas.openxmlformats.org/drawingml/2006/main" xmlns:p="http://schemas.openxmlformats.org/presentationml/2006/main" xmlns:r="http://schemas.openxmlformats.org/officeDocument/2006/relationships">
+<p:sld xmlns:a="http://schemas.openxmlformats.org/drawingml/2006/main" xmlns:r="http://schemas.openxmlformats.org/officeDocument/2006/relationships" xmlns:p="http://schemas.openxmlformats.org/presentationml/2006/main">
   <p:cSld>
     <p:bg>
       <p:bgPr>
@@ -7229,7 +7036,14 @@
         <p:cNvGrpSpPr/>
         <p:nvPr/>
       </p:nvGrpSpPr>
-      <p:grpSpPr/>
+      <p:grpSpPr>
+        <a:xfrm>
+          <a:off x="0" y="0"/>
+          <a:ext cx="0" cy="0"/>
+          <a:chOff x="0" y="0"/>
+          <a:chExt cx="0" cy="0"/>
+        </a:xfrm>
+      </p:grpSpPr>
       <p:sp>
         <p:nvSpPr>
           <p:cNvPr id="2" name="TextBox 1"/>
@@ -7247,7 +7061,7 @@
           <a:noFill/>
         </p:spPr>
         <p:txBody>
-          <a:bodyPr wrap="square" anchor="t" lIns="0" rIns="0" tIns="0" bIns="0">
+          <a:bodyPr wrap="square" lIns="0" tIns="0" rIns="0" bIns="0" anchor="t">
             <a:spAutoFit/>
           </a:bodyPr>
           <a:lstStyle/>
@@ -7267,7 +7081,6 @@
                 </a:solidFill>
                 <a:latin typeface="Leelawadee UI"/>
                 <a:cs typeface="Leelawadee UI"/>
-                <a:ea typeface="Leelawadee UI"/>
               </a:rPr>
               <a:t>ทำให้มองไม่มั่ว</a:t>
             </a:r>
@@ -7311,10 +7124,11 @@
           </a:fontRef>
         </p:style>
         <p:txBody>
-          <a:bodyPr rtlCol="0" anchor="ctr" wrap="square"/>
+          <a:bodyPr wrap="square" rtlCol="0" anchor="ctr"/>
           <a:lstStyle/>
           <a:p>
             <a:pPr algn="ctr"/>
+            <a:endParaRPr/>
           </a:p>
         </p:txBody>
       </p:sp>
@@ -7327,7 +7141,7 @@
           <p:nvPr/>
         </p:nvPicPr>
         <p:blipFill>
-          <a:blip r:embed="rId2"/>
+          <a:blip r:embed="rId3"/>
           <a:stretch>
             <a:fillRect/>
           </a:stretch>
@@ -7359,12 +7173,12 @@
           <a:noFill/>
         </p:spPr>
         <p:txBody>
-          <a:bodyPr wrap="square" anchor="t" lIns="0" rIns="0" tIns="0" bIns="0">
+          <a:bodyPr wrap="square" lIns="0" tIns="0" rIns="0" bIns="0" anchor="t">
             <a:spAutoFit/>
           </a:bodyPr>
           <a:lstStyle/>
           <a:p>
-            <a:pPr algn="l" marL="274320" indent="-274320">
+            <a:pPr marL="274320" indent="-274320" algn="l">
               <a:lnSpc>
                 <a:spcPct val="125000"/>
               </a:lnSpc>
@@ -7379,7 +7193,6 @@
                 </a:solidFill>
                 <a:latin typeface="Leelawadee UI"/>
                 <a:cs typeface="Leelawadee UI"/>
-                <a:ea typeface="Leelawadee UI"/>
               </a:rPr>
               <a:t>▸  ชุดข้อมูลเก็บเอง 3,333 ภาพ  ·  3 ชนิด (capybara / dino / elephant)</a:t>
             </a:r>
@@ -7403,7 +7216,7 @@
           <a:noFill/>
         </p:spPr>
         <p:txBody>
-          <a:bodyPr wrap="square" anchor="t" lIns="0" rIns="0" tIns="0" bIns="0">
+          <a:bodyPr wrap="square" lIns="0" tIns="0" rIns="0" bIns="0" anchor="t">
             <a:spAutoFit/>
           </a:bodyPr>
           <a:lstStyle/>
@@ -7423,7 +7236,6 @@
                 </a:solidFill>
                 <a:latin typeface="Leelawadee UI"/>
                 <a:cs typeface="Leelawadee UI"/>
-                <a:ea typeface="Leelawadee UI"/>
               </a:rPr>
               <a:t>ประตูกัน false positive 3 ชั้น</a:t>
             </a:r>
@@ -7447,12 +7259,12 @@
           <a:noFill/>
         </p:spPr>
         <p:txBody>
-          <a:bodyPr wrap="square" anchor="t" lIns="0" rIns="0" tIns="0" bIns="0">
+          <a:bodyPr wrap="square" lIns="0" tIns="0" rIns="0" bIns="0" anchor="t">
             <a:spAutoFit/>
           </a:bodyPr>
           <a:lstStyle/>
           <a:p>
-            <a:pPr algn="l" marL="274320" indent="-274320">
+            <a:pPr marL="274320" indent="-274320" algn="l">
               <a:lnSpc>
                 <a:spcPct val="125000"/>
               </a:lnSpc>
@@ -7467,13 +7279,12 @@
                 </a:solidFill>
                 <a:latin typeface="Leelawadee UI"/>
                 <a:cs typeface="Leelawadee UI"/>
-                <a:ea typeface="Leelawadee UI"/>
               </a:rPr>
               <a:t>▸  ① ความมั่นใจ ≥ 0.30</a:t>
             </a:r>
           </a:p>
           <a:p>
-            <a:pPr algn="l" marL="274320" indent="-274320">
+            <a:pPr marL="274320" indent="-274320" algn="l">
               <a:lnSpc>
                 <a:spcPct val="125000"/>
               </a:lnSpc>
@@ -7488,13 +7299,12 @@
                 </a:solidFill>
                 <a:latin typeface="Leelawadee UI"/>
                 <a:cs typeface="Leelawadee UI"/>
-                <a:ea typeface="Leelawadee UI"/>
               </a:rPr>
               <a:t>▸  ② ขนาดกรอบต้องสมเหตุผลกับระยะ 0.5–4.5 ม.</a:t>
             </a:r>
           </a:p>
           <a:p>
-            <a:pPr algn="l" marL="274320" indent="-274320">
+            <a:pPr marL="274320" indent="-274320" algn="l">
               <a:lnSpc>
                 <a:spcPct val="125000"/>
               </a:lnSpc>
@@ -7509,7 +7319,6 @@
                 </a:solidFill>
                 <a:latin typeface="Leelawadee UI"/>
                 <a:cs typeface="Leelawadee UI"/>
-                <a:ea typeface="Leelawadee UI"/>
               </a:rPr>
               <a:t>▸  ③ ต้องเห็นซ้ำที่เดิม 3 เฟรม</a:t>
             </a:r>
@@ -7555,7 +7364,7 @@
           </a:fontRef>
         </p:style>
         <p:txBody>
-          <a:bodyPr rtlCol="0" anchor="ctr" wrap="square" lIns="219456" rIns="219456"/>
+          <a:bodyPr wrap="square" lIns="219456" rIns="219456" rtlCol="0" anchor="ctr"/>
           <a:lstStyle/>
           <a:p>
             <a:pPr algn="l">
@@ -7573,7 +7382,6 @@
                 </a:solidFill>
                 <a:latin typeface="Leelawadee UI"/>
                 <a:cs typeface="Leelawadee UI"/>
-                <a:ea typeface="Leelawadee UI"/>
               </a:rPr>
               <a:t>บทเรียน</a:t>
             </a:r>
@@ -7594,7 +7402,6 @@
                 </a:solidFill>
                 <a:latin typeface="Leelawadee UI"/>
                 <a:cs typeface="Leelawadee UI"/>
-                <a:ea typeface="Leelawadee UI"/>
               </a:rPr>
               <a:t>ชุดวัดผลที่ไม่มีภาพพื้นหลังเลย = วัดการมองมั่วไม่ได้ตามนิยาม</a:t>
             </a:r>
@@ -7610,7 +7417,7 @@
 </file>
 
 <file path=ppt/slides/slide8.xml><?xml version="1.0" encoding="utf-8"?>
-<p:sld xmlns:a="http://schemas.openxmlformats.org/drawingml/2006/main" xmlns:p="http://schemas.openxmlformats.org/presentationml/2006/main" xmlns:r="http://schemas.openxmlformats.org/officeDocument/2006/relationships">
+<p:sld xmlns:a="http://schemas.openxmlformats.org/drawingml/2006/main" xmlns:r="http://schemas.openxmlformats.org/officeDocument/2006/relationships" xmlns:p="http://schemas.openxmlformats.org/presentationml/2006/main">
   <p:cSld>
     <p:bg>
       <p:bgPr>
@@ -7626,7 +7433,14 @@
         <p:cNvGrpSpPr/>
         <p:nvPr/>
       </p:nvGrpSpPr>
-      <p:grpSpPr/>
+      <p:grpSpPr>
+        <a:xfrm>
+          <a:off x="0" y="0"/>
+          <a:ext cx="0" cy="0"/>
+          <a:chOff x="0" y="0"/>
+          <a:chExt cx="0" cy="0"/>
+        </a:xfrm>
+      </p:grpSpPr>
       <p:sp>
         <p:nvSpPr>
           <p:cNvPr id="2" name="TextBox 1"/>
@@ -7644,7 +7458,7 @@
           <a:noFill/>
         </p:spPr>
         <p:txBody>
-          <a:bodyPr wrap="square" anchor="t" lIns="0" rIns="0" tIns="0" bIns="0">
+          <a:bodyPr wrap="square" lIns="0" tIns="0" rIns="0" bIns="0" anchor="t">
             <a:spAutoFit/>
           </a:bodyPr>
           <a:lstStyle/>
@@ -7664,7 +7478,6 @@
                 </a:solidFill>
                 <a:latin typeface="Leelawadee UI"/>
                 <a:cs typeface="Leelawadee UI"/>
-                <a:ea typeface="Leelawadee UI"/>
               </a:rPr>
               <a:t>เลือกเป้าด้วย UI</a:t>
             </a:r>
@@ -7708,10 +7521,11 @@
           </a:fontRef>
         </p:style>
         <p:txBody>
-          <a:bodyPr rtlCol="0" anchor="ctr" wrap="square"/>
+          <a:bodyPr wrap="square" rtlCol="0" anchor="ctr"/>
           <a:lstStyle/>
           <a:p>
             <a:pPr algn="ctr"/>
+            <a:endParaRPr/>
           </a:p>
         </p:txBody>
       </p:sp>
@@ -7756,10 +7570,11 @@
           </a:fontRef>
         </p:style>
         <p:txBody>
-          <a:bodyPr rtlCol="0" anchor="ctr" wrap="square"/>
+          <a:bodyPr wrap="square" rtlCol="0" anchor="ctr"/>
           <a:lstStyle/>
           <a:p>
             <a:pPr algn="ctr"/>
+            <a:endParaRPr/>
           </a:p>
         </p:txBody>
       </p:sp>
@@ -7780,7 +7595,7 @@
           <a:noFill/>
         </p:spPr>
         <p:txBody>
-          <a:bodyPr wrap="square" anchor="ctr" lIns="0" rIns="0" tIns="0" bIns="0">
+          <a:bodyPr wrap="square" lIns="0" tIns="0" rIns="0" bIns="0" anchor="ctr">
             <a:spAutoFit/>
           </a:bodyPr>
           <a:lstStyle/>
@@ -7800,7 +7615,6 @@
                 </a:solidFill>
                 <a:latin typeface="Leelawadee UI"/>
                 <a:cs typeface="Leelawadee UI"/>
-                <a:ea typeface="Leelawadee UI"/>
               </a:rPr>
               <a:t>🖼  ภาพหน้าจอขณะล็อกเป้า</a:t>
             </a:r>
@@ -7821,7 +7635,6 @@
                 </a:solidFill>
                 <a:latin typeface="Leelawadee UI"/>
                 <a:cs typeface="Leelawadee UI"/>
-                <a:ea typeface="Leelawadee UI"/>
               </a:rPr>
               <a:t>ให้เห็นกรอบตรวจจับ + เป้าเล็งแดง + จุด zero</a:t>
             </a:r>
@@ -7845,12 +7658,12 @@
           <a:noFill/>
         </p:spPr>
         <p:txBody>
-          <a:bodyPr wrap="square" anchor="t" lIns="0" rIns="0" tIns="0" bIns="0">
+          <a:bodyPr wrap="square" lIns="0" tIns="0" rIns="0" bIns="0" anchor="t">
             <a:spAutoFit/>
           </a:bodyPr>
           <a:lstStyle/>
           <a:p>
-            <a:pPr algn="l" marL="274320" indent="-274320">
+            <a:pPr marL="274320" indent="-274320" algn="l">
               <a:lnSpc>
                 <a:spcPct val="125000"/>
               </a:lnSpc>
@@ -7865,13 +7678,12 @@
                 </a:solidFill>
                 <a:latin typeface="Leelawadee UI"/>
                 <a:cs typeface="Leelawadee UI"/>
-                <a:ea typeface="Leelawadee UI"/>
               </a:rPr>
               <a:t>▸  คลิกซ้ายที่ตุ๊กตาตัวไหนก็ได้ใน 3 ตัว → ป้อมหันไปล็อกตัวนั้น</a:t>
             </a:r>
           </a:p>
           <a:p>
-            <a:pPr algn="l" marL="274320" indent="-274320">
+            <a:pPr marL="274320" indent="-274320" algn="l">
               <a:lnSpc>
                 <a:spcPct val="125000"/>
               </a:lnSpc>
@@ -7886,13 +7698,12 @@
                 </a:solidFill>
                 <a:latin typeface="Leelawadee UI"/>
                 <a:cs typeface="Leelawadee UI"/>
-                <a:ea typeface="Leelawadee UI"/>
               </a:rPr>
               <a:t>▸  F ยิง  ·  G หยุดล้อฉุกเฉิน (กดได้ทุกสถานะ)  ·  C คืนป้อมกลางลำ</a:t>
             </a:r>
           </a:p>
           <a:p>
-            <a:pPr algn="l" marL="274320" indent="-274320">
+            <a:pPr marL="274320" indent="-274320" algn="l">
               <a:lnSpc>
                 <a:spcPct val="125000"/>
               </a:lnSpc>
@@ -7907,7 +7718,6 @@
                 </a:solidFill>
                 <a:latin typeface="Leelawadee UI"/>
                 <a:cs typeface="Leelawadee UI"/>
-                <a:ea typeface="Leelawadee UI"/>
               </a:rPr>
               <a:t>▸  ขยับป้อมเองเมื่อไหร่ ระบบล้างสถานะล็อกทันที — กันยิงโดยเชื่อภาพเก่า</a:t>
             </a:r>
@@ -7953,7 +7763,7 @@
           </a:fontRef>
         </p:style>
         <p:txBody>
-          <a:bodyPr rtlCol="0" anchor="ctr" wrap="square" lIns="219456" rIns="219456"/>
+          <a:bodyPr wrap="square" lIns="219456" rIns="219456" rtlCol="0" anchor="ctr"/>
           <a:lstStyle/>
           <a:p>
             <a:pPr algn="l">
@@ -7971,7 +7781,6 @@
                 </a:solidFill>
                 <a:latin typeface="Leelawadee UI"/>
                 <a:cs typeface="Leelawadee UI"/>
-                <a:ea typeface="Leelawadee UI"/>
               </a:rPr>
               <a:t>พร้อมสาธิตครับ</a:t>
             </a:r>
@@ -8317,44 +8126,44 @@
         <a:sysClr val="window" lastClr="FFFFFF"/>
       </a:lt1>
       <a:dk2>
-        <a:srgbClr val="1F497D"/>
+        <a:srgbClr val="0E2841"/>
       </a:dk2>
       <a:lt2>
-        <a:srgbClr val="EEECE1"/>
+        <a:srgbClr val="E8E8E8"/>
       </a:lt2>
       <a:accent1>
-        <a:srgbClr val="4F81BD"/>
+        <a:srgbClr val="156082"/>
       </a:accent1>
       <a:accent2>
-        <a:srgbClr val="C0504D"/>
+        <a:srgbClr val="E97132"/>
       </a:accent2>
       <a:accent3>
-        <a:srgbClr val="9BBB59"/>
+        <a:srgbClr val="196B24"/>
       </a:accent3>
       <a:accent4>
-        <a:srgbClr val="8064A2"/>
+        <a:srgbClr val="0F9ED5"/>
       </a:accent4>
       <a:accent5>
-        <a:srgbClr val="4BACC6"/>
+        <a:srgbClr val="A02B93"/>
       </a:accent5>
       <a:accent6>
-        <a:srgbClr val="F79646"/>
+        <a:srgbClr val="4EA72E"/>
       </a:accent6>
       <a:hlink>
-        <a:srgbClr val="0000FF"/>
+        <a:srgbClr val="467886"/>
       </a:hlink>
       <a:folHlink>
-        <a:srgbClr val="800080"/>
+        <a:srgbClr val="96607D"/>
       </a:folHlink>
     </a:clrScheme>
     <a:fontScheme name="Office">
       <a:majorFont>
-        <a:latin typeface="Calibri"/>
+        <a:latin typeface="Aptos Display" panose="02110004020202020204"/>
         <a:ea typeface=""/>
         <a:cs typeface=""/>
-        <a:font script="Jpan" typeface="ＭＳ Ｐゴシック"/>
+        <a:font script="Jpan" typeface="游ゴシック Light"/>
         <a:font script="Hang" typeface="맑은 고딕"/>
-        <a:font script="Hans" typeface="宋体"/>
+        <a:font script="Hans" typeface="等线 Light"/>
         <a:font script="Hant" typeface="新細明體"/>
         <a:font script="Arab" typeface="Times New Roman"/>
         <a:font script="Hebr" typeface="Times New Roman"/>
@@ -8382,14 +8191,31 @@
         <a:font script="Viet" typeface="Times New Roman"/>
         <a:font script="Uigh" typeface="Microsoft Uighur"/>
         <a:font script="Geor" typeface="Sylfaen"/>
+        <a:font script="Armn" typeface="Arial"/>
+        <a:font script="Bugi" typeface="Leelawadee UI"/>
+        <a:font script="Bopo" typeface="Microsoft JhengHei"/>
+        <a:font script="Java" typeface="Javanese Text"/>
+        <a:font script="Lisu" typeface="Segoe UI"/>
+        <a:font script="Mymr" typeface="Myanmar Text"/>
+        <a:font script="Nkoo" typeface="Ebrima"/>
+        <a:font script="Olck" typeface="Nirmala UI"/>
+        <a:font script="Osma" typeface="Ebrima"/>
+        <a:font script="Phag" typeface="Phagspa"/>
+        <a:font script="Syrn" typeface="Estrangelo Edessa"/>
+        <a:font script="Syrj" typeface="Estrangelo Edessa"/>
+        <a:font script="Syre" typeface="Estrangelo Edessa"/>
+        <a:font script="Sora" typeface="Nirmala UI"/>
+        <a:font script="Tale" typeface="Microsoft Tai Le"/>
+        <a:font script="Talu" typeface="Microsoft New Tai Lue"/>
+        <a:font script="Tfng" typeface="Ebrima"/>
       </a:majorFont>
       <a:minorFont>
-        <a:latin typeface="Calibri"/>
+        <a:latin typeface="Aptos" panose="02110004020202020204"/>
         <a:ea typeface=""/>
         <a:cs typeface=""/>
-        <a:font script="Jpan" typeface="ＭＳ Ｐゴシック"/>
+        <a:font script="Jpan" typeface="游ゴシック"/>
         <a:font script="Hang" typeface="맑은 고딕"/>
-        <a:font script="Hans" typeface="宋体"/>
+        <a:font script="Hans" typeface="等线"/>
         <a:font script="Hant" typeface="新細明體"/>
         <a:font script="Arab" typeface="Arial"/>
         <a:font script="Hebr" typeface="Arial"/>
@@ -8417,6 +8243,23 @@
         <a:font script="Viet" typeface="Arial"/>
         <a:font script="Uigh" typeface="Microsoft Uighur"/>
         <a:font script="Geor" typeface="Sylfaen"/>
+        <a:font script="Armn" typeface="Arial"/>
+        <a:font script="Bugi" typeface="Leelawadee UI"/>
+        <a:font script="Bopo" typeface="Microsoft JhengHei"/>
+        <a:font script="Java" typeface="Javanese Text"/>
+        <a:font script="Lisu" typeface="Segoe UI"/>
+        <a:font script="Mymr" typeface="Myanmar Text"/>
+        <a:font script="Nkoo" typeface="Ebrima"/>
+        <a:font script="Olck" typeface="Nirmala UI"/>
+        <a:font script="Osma" typeface="Ebrima"/>
+        <a:font script="Phag" typeface="Phagspa"/>
+        <a:font script="Syrn" typeface="Estrangelo Edessa"/>
+        <a:font script="Syrj" typeface="Estrangelo Edessa"/>
+        <a:font script="Syre" typeface="Estrangelo Edessa"/>
+        <a:font script="Sora" typeface="Nirmala UI"/>
+        <a:font script="Tale" typeface="Microsoft Tai Le"/>
+        <a:font script="Talu" typeface="Microsoft New Tai Lue"/>
+        <a:font script="Tfng" typeface="Ebrima"/>
       </a:minorFont>
     </a:fontScheme>
     <a:fmtScheme name="Office">
@@ -8428,180 +8271,136 @@
           <a:gsLst>
             <a:gs pos="0">
               <a:schemeClr val="phClr">
-                <a:tint val="50000"/>
-                <a:satMod val="300000"/>
+                <a:lumMod val="110000"/>
+                <a:satMod val="105000"/>
+                <a:tint val="67000"/>
               </a:schemeClr>
             </a:gs>
-            <a:gs pos="35000">
+            <a:gs pos="50000">
               <a:schemeClr val="phClr">
-                <a:tint val="37000"/>
-                <a:satMod val="300000"/>
+                <a:lumMod val="105000"/>
+                <a:satMod val="103000"/>
+                <a:tint val="73000"/>
               </a:schemeClr>
             </a:gs>
             <a:gs pos="100000">
               <a:schemeClr val="phClr">
-                <a:tint val="15000"/>
-                <a:satMod val="350000"/>
+                <a:lumMod val="105000"/>
+                <a:satMod val="109000"/>
+                <a:tint val="81000"/>
               </a:schemeClr>
             </a:gs>
           </a:gsLst>
-          <a:lin ang="16200000" scaled="1"/>
+          <a:lin ang="5400000" scaled="0"/>
         </a:gradFill>
         <a:gradFill rotWithShape="1">
           <a:gsLst>
             <a:gs pos="0">
               <a:schemeClr val="phClr">
-                <a:tint val="100000"/>
+                <a:satMod val="103000"/>
+                <a:lumMod val="102000"/>
+                <a:tint val="94000"/>
+              </a:schemeClr>
+            </a:gs>
+            <a:gs pos="50000">
+              <a:schemeClr val="phClr">
+                <a:satMod val="110000"/>
+                <a:lumMod val="100000"/>
                 <a:shade val="100000"/>
-                <a:satMod val="130000"/>
               </a:schemeClr>
             </a:gs>
             <a:gs pos="100000">
               <a:schemeClr val="phClr">
-                <a:tint val="50000"/>
-                <a:shade val="100000"/>
-                <a:satMod val="350000"/>
+                <a:lumMod val="99000"/>
+                <a:satMod val="120000"/>
+                <a:shade val="78000"/>
               </a:schemeClr>
             </a:gs>
           </a:gsLst>
-          <a:lin ang="16200000" scaled="0"/>
+          <a:lin ang="5400000" scaled="0"/>
         </a:gradFill>
       </a:fillStyleLst>
       <a:lnStyleLst>
-        <a:ln w="9525" cap="flat" cmpd="sng" algn="ctr">
+        <a:ln w="12700" cap="flat" cmpd="sng" algn="ctr">
           <a:solidFill>
-            <a:schemeClr val="phClr">
-              <a:shade val="95000"/>
-              <a:satMod val="105000"/>
-            </a:schemeClr>
+            <a:schemeClr val="phClr"/>
           </a:solidFill>
           <a:prstDash val="solid"/>
+          <a:miter lim="800000"/>
+        </a:ln>
+        <a:ln w="19050" cap="flat" cmpd="sng" algn="ctr">
+          <a:solidFill>
+            <a:schemeClr val="phClr"/>
+          </a:solidFill>
+          <a:prstDash val="solid"/>
+          <a:miter lim="800000"/>
         </a:ln>
         <a:ln w="25400" cap="flat" cmpd="sng" algn="ctr">
           <a:solidFill>
             <a:schemeClr val="phClr"/>
           </a:solidFill>
           <a:prstDash val="solid"/>
-        </a:ln>
-        <a:ln w="38100" cap="flat" cmpd="sng" algn="ctr">
-          <a:solidFill>
-            <a:schemeClr val="phClr"/>
-          </a:solidFill>
-          <a:prstDash val="solid"/>
+          <a:miter lim="800000"/>
         </a:ln>
       </a:lnStyleLst>
       <a:effectStyleLst>
         <a:effectStyle>
+          <a:effectLst/>
+        </a:effectStyle>
+        <a:effectStyle>
+          <a:effectLst/>
+        </a:effectStyle>
+        <a:effectStyle>
           <a:effectLst>
-            <a:outerShdw blurRad="40000" dist="20000" dir="5400000" rotWithShape="0">
+            <a:outerShdw blurRad="57150" dist="19050" dir="5400000" algn="ctr" rotWithShape="0">
               <a:srgbClr val="000000">
-                <a:alpha val="38000"/>
+                <a:alpha val="63000"/>
               </a:srgbClr>
             </a:outerShdw>
           </a:effectLst>
-        </a:effectStyle>
-        <a:effectStyle>
-          <a:effectLst>
-            <a:outerShdw blurRad="40000" dist="23000" dir="5400000" rotWithShape="0">
-              <a:srgbClr val="000000">
-                <a:alpha val="35000"/>
-              </a:srgbClr>
-            </a:outerShdw>
-          </a:effectLst>
-        </a:effectStyle>
-        <a:effectStyle>
-          <a:effectLst>
-            <a:outerShdw blurRad="40000" dist="23000" dir="5400000" rotWithShape="0">
-              <a:srgbClr val="000000">
-                <a:alpha val="35000"/>
-              </a:srgbClr>
-            </a:outerShdw>
-          </a:effectLst>
-          <a:scene3d>
-            <a:camera prst="orthographicFront">
-              <a:rot lat="0" lon="0" rev="0"/>
-            </a:camera>
-            <a:lightRig rig="threePt" dir="t">
-              <a:rot lat="0" lon="0" rev="1200000"/>
-            </a:lightRig>
-          </a:scene3d>
-          <a:sp3d>
-            <a:bevelT w="63500" h="25400"/>
-          </a:sp3d>
         </a:effectStyle>
       </a:effectStyleLst>
       <a:bgFillStyleLst>
         <a:solidFill>
           <a:schemeClr val="phClr"/>
         </a:solidFill>
+        <a:solidFill>
+          <a:schemeClr val="phClr">
+            <a:tint val="95000"/>
+            <a:satMod val="170000"/>
+          </a:schemeClr>
+        </a:solidFill>
         <a:gradFill rotWithShape="1">
           <a:gsLst>
             <a:gs pos="0">
               <a:schemeClr val="phClr">
-                <a:tint val="40000"/>
-                <a:satMod val="350000"/>
+                <a:tint val="93000"/>
+                <a:satMod val="150000"/>
+                <a:shade val="98000"/>
+                <a:lumMod val="102000"/>
               </a:schemeClr>
             </a:gs>
-            <a:gs pos="40000">
+            <a:gs pos="50000">
               <a:schemeClr val="phClr">
-                <a:tint val="45000"/>
-                <a:shade val="99000"/>
-                <a:satMod val="350000"/>
+                <a:tint val="98000"/>
+                <a:satMod val="130000"/>
+                <a:shade val="90000"/>
+                <a:lumMod val="103000"/>
               </a:schemeClr>
             </a:gs>
             <a:gs pos="100000">
               <a:schemeClr val="phClr">
-                <a:shade val="20000"/>
-                <a:satMod val="255000"/>
+                <a:shade val="63000"/>
+                <a:satMod val="120000"/>
               </a:schemeClr>
             </a:gs>
           </a:gsLst>
-          <a:path path="circle">
-            <a:fillToRect l="50000" t="-80000" r="50000" b="180000"/>
-          </a:path>
-        </a:gradFill>
-        <a:gradFill rotWithShape="1">
-          <a:gsLst>
-            <a:gs pos="0">
-              <a:schemeClr val="phClr">
-                <a:tint val="80000"/>
-                <a:satMod val="300000"/>
-              </a:schemeClr>
-            </a:gs>
-            <a:gs pos="100000">
-              <a:schemeClr val="phClr">
-                <a:shade val="30000"/>
-                <a:satMod val="200000"/>
-              </a:schemeClr>
-            </a:gs>
-          </a:gsLst>
-          <a:path path="circle">
-            <a:fillToRect l="50000" t="50000" r="50000" b="50000"/>
-          </a:path>
+          <a:lin ang="5400000" scaled="0"/>
         </a:gradFill>
       </a:bgFillStyleLst>
     </a:fmtScheme>
   </a:themeElements>
   <a:objectDefaults>
-    <a:spDef>
-      <a:spPr/>
-      <a:bodyPr/>
-      <a:lstStyle/>
-      <a:style>
-        <a:lnRef idx="1">
-          <a:schemeClr val="accent1"/>
-        </a:lnRef>
-        <a:fillRef idx="3">
-          <a:schemeClr val="accent1"/>
-        </a:fillRef>
-        <a:effectRef idx="2">
-          <a:schemeClr val="accent1"/>
-        </a:effectRef>
-        <a:fontRef idx="minor">
-          <a:schemeClr val="lt1"/>
-        </a:fontRef>
-      </a:style>
-    </a:spDef>
     <a:lnDef>
       <a:spPr/>
       <a:bodyPr/>
@@ -8623,5 +8422,10 @@
     </a:lnDef>
   </a:objectDefaults>
   <a:extraClrSchemeLst/>
+  <a:extLst>
+    <a:ext uri="{05A4C25C-085E-4340-85A3-A5531E510DB2}">
+      <thm15:themeFamily xmlns:thm15="http://schemas.microsoft.com/office/thememl/2012/main" name="Office Theme" id="{2E142A2C-CD16-42D6-873A-C26D2A0506FA}" vid="{1BDDFF52-6CD6-40A5-AB3C-68EB2F1E4D0A}"/>
+    </a:ext>
+  </a:extLst>
 </a:theme>
 </file>